--- a/public/videos/repositories/reserve-serapi/reserve-serapi-tech-preview.pptx
+++ b/public/videos/repositories/reserve-serapi/reserve-serapi-tech-preview.pptx
@@ -134,7 +134,7 @@
           <p:cNvPr id="2" name="タイトル 1">
             <a:extLst>
               <a:ext uri="{FF2B5EF4-FFF2-40B4-BE49-F238E27FC236}">
-                <a16:creationId xmlns:a16="http://schemas.microsoft.com/office/drawing/2014/main" id="{98175403-98F1-D1FE-3C1A-41A42A940E3B}"/>
+                <a16:creationId xmlns:a16="http://schemas.microsoft.com/office/drawing/2014/main" id="{E08C5571-6863-D9CF-E701-9F1C2B166C8E}"/>
               </a:ext>
             </a:extLst>
           </p:cNvPr>
@@ -171,7 +171,7 @@
           <p:cNvPr id="3" name="字幕 2">
             <a:extLst>
               <a:ext uri="{FF2B5EF4-FFF2-40B4-BE49-F238E27FC236}">
-                <a16:creationId xmlns:a16="http://schemas.microsoft.com/office/drawing/2014/main" id="{74676EB1-BF49-3135-C31A-203F5DEB8DAB}"/>
+                <a16:creationId xmlns:a16="http://schemas.microsoft.com/office/drawing/2014/main" id="{188BBEFF-AD2F-9319-235E-12405D8FD981}"/>
               </a:ext>
             </a:extLst>
           </p:cNvPr>
@@ -241,7 +241,7 @@
           <p:cNvPr id="4" name="日付プレースホルダー 3">
             <a:extLst>
               <a:ext uri="{FF2B5EF4-FFF2-40B4-BE49-F238E27FC236}">
-                <a16:creationId xmlns:a16="http://schemas.microsoft.com/office/drawing/2014/main" id="{42946CEF-8F81-BDEB-041D-7295DC5731A0}"/>
+                <a16:creationId xmlns:a16="http://schemas.microsoft.com/office/drawing/2014/main" id="{36C8387A-F93A-38ED-2DFD-6BEF6F41F484}"/>
               </a:ext>
             </a:extLst>
           </p:cNvPr>
@@ -257,7 +257,7 @@
           <a:bodyPr/>
           <a:lstStyle/>
           <a:p>
-            <a:fld id="{42D500CB-402E-49AC-BB5E-82D002147A17}" type="datetimeFigureOut">
+            <a:fld id="{7C5932AC-8A4A-4D44-A795-EB17C097D024}" type="datetimeFigureOut">
               <a:rPr kumimoji="1" lang="ja-JP" altLang="en-US" smtClean="0"/>
               <a:t>2026/7/30</a:t>
             </a:fld>
@@ -270,7 +270,7 @@
           <p:cNvPr id="5" name="フッター プレースホルダー 4">
             <a:extLst>
               <a:ext uri="{FF2B5EF4-FFF2-40B4-BE49-F238E27FC236}">
-                <a16:creationId xmlns:a16="http://schemas.microsoft.com/office/drawing/2014/main" id="{700AE0C8-ED34-0BFF-091E-AD1C0265E022}"/>
+                <a16:creationId xmlns:a16="http://schemas.microsoft.com/office/drawing/2014/main" id="{E19CA706-BB46-B473-3C9C-993947BA5ED4}"/>
               </a:ext>
             </a:extLst>
           </p:cNvPr>
@@ -295,7 +295,7 @@
           <p:cNvPr id="6" name="スライド番号プレースホルダー 5">
             <a:extLst>
               <a:ext uri="{FF2B5EF4-FFF2-40B4-BE49-F238E27FC236}">
-                <a16:creationId xmlns:a16="http://schemas.microsoft.com/office/drawing/2014/main" id="{47611F16-69DD-A5E5-3DB6-693390897C53}"/>
+                <a16:creationId xmlns:a16="http://schemas.microsoft.com/office/drawing/2014/main" id="{1D2B1295-CBDA-50D3-A6F2-4D055BEBE8E9}"/>
               </a:ext>
             </a:extLst>
           </p:cNvPr>
@@ -311,7 +311,7 @@
           <a:bodyPr/>
           <a:lstStyle/>
           <a:p>
-            <a:fld id="{3F0B1D43-3968-46F5-A1AB-0CB50E424DD1}" type="slidenum">
+            <a:fld id="{79E68B47-8499-4127-ADBF-8D3F68AAD936}" type="slidenum">
               <a:rPr kumimoji="1" lang="ja-JP" altLang="en-US" smtClean="0"/>
               <a:t>‹#›</a:t>
             </a:fld>
@@ -322,7 +322,7 @@
     </p:spTree>
     <p:extLst>
       <p:ext uri="{BB962C8B-B14F-4D97-AF65-F5344CB8AC3E}">
-        <p14:creationId xmlns:p14="http://schemas.microsoft.com/office/powerpoint/2010/main" val="4015832625"/>
+        <p14:creationId xmlns:p14="http://schemas.microsoft.com/office/powerpoint/2010/main" val="2094395359"/>
       </p:ext>
     </p:extLst>
   </p:cSld>
@@ -354,7 +354,7 @@
           <p:cNvPr id="2" name="タイトル 1">
             <a:extLst>
               <a:ext uri="{FF2B5EF4-FFF2-40B4-BE49-F238E27FC236}">
-                <a16:creationId xmlns:a16="http://schemas.microsoft.com/office/drawing/2014/main" id="{023E3849-F6E4-F532-5446-24E9F697D986}"/>
+                <a16:creationId xmlns:a16="http://schemas.microsoft.com/office/drawing/2014/main" id="{2016B64B-8B31-1B34-519C-3301BBD61394}"/>
               </a:ext>
             </a:extLst>
           </p:cNvPr>
@@ -382,7 +382,7 @@
           <p:cNvPr id="3" name="縦書きテキスト プレースホルダー 2">
             <a:extLst>
               <a:ext uri="{FF2B5EF4-FFF2-40B4-BE49-F238E27FC236}">
-                <a16:creationId xmlns:a16="http://schemas.microsoft.com/office/drawing/2014/main" id="{4AAC066F-D86C-1507-B35F-588EE89A4123}"/>
+                <a16:creationId xmlns:a16="http://schemas.microsoft.com/office/drawing/2014/main" id="{6DA32D8C-0ED9-57EC-AD15-9194DCCCEC4B}"/>
               </a:ext>
             </a:extLst>
           </p:cNvPr>
@@ -471,7 +471,7 @@
           <p:cNvPr id="4" name="日付プレースホルダー 3">
             <a:extLst>
               <a:ext uri="{FF2B5EF4-FFF2-40B4-BE49-F238E27FC236}">
-                <a16:creationId xmlns:a16="http://schemas.microsoft.com/office/drawing/2014/main" id="{8851BD90-0AB2-467C-B2A2-339FC869A6C8}"/>
+                <a16:creationId xmlns:a16="http://schemas.microsoft.com/office/drawing/2014/main" id="{F571E120-A55E-76C4-F596-3CB9D8DEE29A}"/>
               </a:ext>
             </a:extLst>
           </p:cNvPr>
@@ -487,7 +487,7 @@
           <a:bodyPr/>
           <a:lstStyle/>
           <a:p>
-            <a:fld id="{42D500CB-402E-49AC-BB5E-82D002147A17}" type="datetimeFigureOut">
+            <a:fld id="{7C5932AC-8A4A-4D44-A795-EB17C097D024}" type="datetimeFigureOut">
               <a:rPr kumimoji="1" lang="ja-JP" altLang="en-US" smtClean="0"/>
               <a:t>2026/7/30</a:t>
             </a:fld>
@@ -500,7 +500,7 @@
           <p:cNvPr id="5" name="フッター プレースホルダー 4">
             <a:extLst>
               <a:ext uri="{FF2B5EF4-FFF2-40B4-BE49-F238E27FC236}">
-                <a16:creationId xmlns:a16="http://schemas.microsoft.com/office/drawing/2014/main" id="{1F17D656-AE47-86BD-EBB2-B2B7CEA3FFDD}"/>
+                <a16:creationId xmlns:a16="http://schemas.microsoft.com/office/drawing/2014/main" id="{058E6A7F-50AD-B4B0-832C-D545294707D2}"/>
               </a:ext>
             </a:extLst>
           </p:cNvPr>
@@ -525,7 +525,7 @@
           <p:cNvPr id="6" name="スライド番号プレースホルダー 5">
             <a:extLst>
               <a:ext uri="{FF2B5EF4-FFF2-40B4-BE49-F238E27FC236}">
-                <a16:creationId xmlns:a16="http://schemas.microsoft.com/office/drawing/2014/main" id="{C4CB4638-E719-CC54-79F7-9DFE3986985E}"/>
+                <a16:creationId xmlns:a16="http://schemas.microsoft.com/office/drawing/2014/main" id="{87239920-A4CB-24CC-F10F-E8FA21EA4444}"/>
               </a:ext>
             </a:extLst>
           </p:cNvPr>
@@ -541,7 +541,7 @@
           <a:bodyPr/>
           <a:lstStyle/>
           <a:p>
-            <a:fld id="{3F0B1D43-3968-46F5-A1AB-0CB50E424DD1}" type="slidenum">
+            <a:fld id="{79E68B47-8499-4127-ADBF-8D3F68AAD936}" type="slidenum">
               <a:rPr kumimoji="1" lang="ja-JP" altLang="en-US" smtClean="0"/>
               <a:t>‹#›</a:t>
             </a:fld>
@@ -552,7 +552,7 @@
     </p:spTree>
     <p:extLst>
       <p:ext uri="{BB962C8B-B14F-4D97-AF65-F5344CB8AC3E}">
-        <p14:creationId xmlns:p14="http://schemas.microsoft.com/office/powerpoint/2010/main" val="1082299873"/>
+        <p14:creationId xmlns:p14="http://schemas.microsoft.com/office/powerpoint/2010/main" val="2139750314"/>
       </p:ext>
     </p:extLst>
   </p:cSld>
@@ -584,7 +584,7 @@
           <p:cNvPr id="2" name="縦書きタイトル 1">
             <a:extLst>
               <a:ext uri="{FF2B5EF4-FFF2-40B4-BE49-F238E27FC236}">
-                <a16:creationId xmlns:a16="http://schemas.microsoft.com/office/drawing/2014/main" id="{7222CC8F-2C11-B5E8-9145-766A5E894F5E}"/>
+                <a16:creationId xmlns:a16="http://schemas.microsoft.com/office/drawing/2014/main" id="{0600A295-550E-F92C-7B99-B04DDB12CBA2}"/>
               </a:ext>
             </a:extLst>
           </p:cNvPr>
@@ -617,7 +617,7 @@
           <p:cNvPr id="3" name="縦書きテキスト プレースホルダー 2">
             <a:extLst>
               <a:ext uri="{FF2B5EF4-FFF2-40B4-BE49-F238E27FC236}">
-                <a16:creationId xmlns:a16="http://schemas.microsoft.com/office/drawing/2014/main" id="{F4970ED9-BE35-FAEC-FDE8-65C6F842FD9D}"/>
+                <a16:creationId xmlns:a16="http://schemas.microsoft.com/office/drawing/2014/main" id="{27368211-D85B-DD0D-ADE5-B84E4397F259}"/>
               </a:ext>
             </a:extLst>
           </p:cNvPr>
@@ -711,7 +711,7 @@
           <p:cNvPr id="4" name="日付プレースホルダー 3">
             <a:extLst>
               <a:ext uri="{FF2B5EF4-FFF2-40B4-BE49-F238E27FC236}">
-                <a16:creationId xmlns:a16="http://schemas.microsoft.com/office/drawing/2014/main" id="{BD16C28F-9AD9-DD9E-50B1-B2104DC46768}"/>
+                <a16:creationId xmlns:a16="http://schemas.microsoft.com/office/drawing/2014/main" id="{992002D6-DE1D-152C-BE9B-41D105068E39}"/>
               </a:ext>
             </a:extLst>
           </p:cNvPr>
@@ -727,7 +727,7 @@
           <a:bodyPr/>
           <a:lstStyle/>
           <a:p>
-            <a:fld id="{42D500CB-402E-49AC-BB5E-82D002147A17}" type="datetimeFigureOut">
+            <a:fld id="{7C5932AC-8A4A-4D44-A795-EB17C097D024}" type="datetimeFigureOut">
               <a:rPr kumimoji="1" lang="ja-JP" altLang="en-US" smtClean="0"/>
               <a:t>2026/7/30</a:t>
             </a:fld>
@@ -740,7 +740,7 @@
           <p:cNvPr id="5" name="フッター プレースホルダー 4">
             <a:extLst>
               <a:ext uri="{FF2B5EF4-FFF2-40B4-BE49-F238E27FC236}">
-                <a16:creationId xmlns:a16="http://schemas.microsoft.com/office/drawing/2014/main" id="{8D2EADBA-2CAB-BF36-1A3D-09810F0D58BA}"/>
+                <a16:creationId xmlns:a16="http://schemas.microsoft.com/office/drawing/2014/main" id="{0CD28BFA-783C-6141-F356-49744B637274}"/>
               </a:ext>
             </a:extLst>
           </p:cNvPr>
@@ -765,7 +765,7 @@
           <p:cNvPr id="6" name="スライド番号プレースホルダー 5">
             <a:extLst>
               <a:ext uri="{FF2B5EF4-FFF2-40B4-BE49-F238E27FC236}">
-                <a16:creationId xmlns:a16="http://schemas.microsoft.com/office/drawing/2014/main" id="{CBF15FBE-6E1A-9120-AA2A-45CDCAB4ACCF}"/>
+                <a16:creationId xmlns:a16="http://schemas.microsoft.com/office/drawing/2014/main" id="{7AC42D75-E54D-E0E1-9DF1-BAF3CEFCAD0E}"/>
               </a:ext>
             </a:extLst>
           </p:cNvPr>
@@ -781,7 +781,7 @@
           <a:bodyPr/>
           <a:lstStyle/>
           <a:p>
-            <a:fld id="{3F0B1D43-3968-46F5-A1AB-0CB50E424DD1}" type="slidenum">
+            <a:fld id="{79E68B47-8499-4127-ADBF-8D3F68AAD936}" type="slidenum">
               <a:rPr kumimoji="1" lang="ja-JP" altLang="en-US" smtClean="0"/>
               <a:t>‹#›</a:t>
             </a:fld>
@@ -792,7 +792,7 @@
     </p:spTree>
     <p:extLst>
       <p:ext uri="{BB962C8B-B14F-4D97-AF65-F5344CB8AC3E}">
-        <p14:creationId xmlns:p14="http://schemas.microsoft.com/office/powerpoint/2010/main" val="2103370294"/>
+        <p14:creationId xmlns:p14="http://schemas.microsoft.com/office/powerpoint/2010/main" val="1007213116"/>
       </p:ext>
     </p:extLst>
   </p:cSld>
@@ -824,7 +824,7 @@
           <p:cNvPr id="2" name="タイトル 1">
             <a:extLst>
               <a:ext uri="{FF2B5EF4-FFF2-40B4-BE49-F238E27FC236}">
-                <a16:creationId xmlns:a16="http://schemas.microsoft.com/office/drawing/2014/main" id="{B2E3B036-903B-62CF-D962-D7D5727B78D2}"/>
+                <a16:creationId xmlns:a16="http://schemas.microsoft.com/office/drawing/2014/main" id="{FDC6302C-E65C-A77A-A726-12F33D3B1A63}"/>
               </a:ext>
             </a:extLst>
           </p:cNvPr>
@@ -852,7 +852,7 @@
           <p:cNvPr id="3" name="コンテンツ プレースホルダー 2">
             <a:extLst>
               <a:ext uri="{FF2B5EF4-FFF2-40B4-BE49-F238E27FC236}">
-                <a16:creationId xmlns:a16="http://schemas.microsoft.com/office/drawing/2014/main" id="{96CFB9AF-0062-F44D-76CA-32D133EF32C3}"/>
+                <a16:creationId xmlns:a16="http://schemas.microsoft.com/office/drawing/2014/main" id="{566558C1-A966-8267-FB0F-208C77E6592E}"/>
               </a:ext>
             </a:extLst>
           </p:cNvPr>
@@ -941,7 +941,7 @@
           <p:cNvPr id="4" name="日付プレースホルダー 3">
             <a:extLst>
               <a:ext uri="{FF2B5EF4-FFF2-40B4-BE49-F238E27FC236}">
-                <a16:creationId xmlns:a16="http://schemas.microsoft.com/office/drawing/2014/main" id="{9AD72C9D-8AEC-C82F-6DEA-9A1C4C91305D}"/>
+                <a16:creationId xmlns:a16="http://schemas.microsoft.com/office/drawing/2014/main" id="{902037AD-9A71-7929-E016-EAF7BB939AAC}"/>
               </a:ext>
             </a:extLst>
           </p:cNvPr>
@@ -957,7 +957,7 @@
           <a:bodyPr/>
           <a:lstStyle/>
           <a:p>
-            <a:fld id="{42D500CB-402E-49AC-BB5E-82D002147A17}" type="datetimeFigureOut">
+            <a:fld id="{7C5932AC-8A4A-4D44-A795-EB17C097D024}" type="datetimeFigureOut">
               <a:rPr kumimoji="1" lang="ja-JP" altLang="en-US" smtClean="0"/>
               <a:t>2026/7/30</a:t>
             </a:fld>
@@ -970,7 +970,7 @@
           <p:cNvPr id="5" name="フッター プレースホルダー 4">
             <a:extLst>
               <a:ext uri="{FF2B5EF4-FFF2-40B4-BE49-F238E27FC236}">
-                <a16:creationId xmlns:a16="http://schemas.microsoft.com/office/drawing/2014/main" id="{A124BC27-C2D4-8B06-F626-8E600199EEBE}"/>
+                <a16:creationId xmlns:a16="http://schemas.microsoft.com/office/drawing/2014/main" id="{407160C7-2084-74BA-BD98-7AC9786AD62C}"/>
               </a:ext>
             </a:extLst>
           </p:cNvPr>
@@ -995,7 +995,7 @@
           <p:cNvPr id="6" name="スライド番号プレースホルダー 5">
             <a:extLst>
               <a:ext uri="{FF2B5EF4-FFF2-40B4-BE49-F238E27FC236}">
-                <a16:creationId xmlns:a16="http://schemas.microsoft.com/office/drawing/2014/main" id="{304A69CA-FAC1-A3BA-C7E9-A28B9211F9A4}"/>
+                <a16:creationId xmlns:a16="http://schemas.microsoft.com/office/drawing/2014/main" id="{D770EC1A-D553-2444-F043-BC4A9FC28CD7}"/>
               </a:ext>
             </a:extLst>
           </p:cNvPr>
@@ -1011,7 +1011,7 @@
           <a:bodyPr/>
           <a:lstStyle/>
           <a:p>
-            <a:fld id="{3F0B1D43-3968-46F5-A1AB-0CB50E424DD1}" type="slidenum">
+            <a:fld id="{79E68B47-8499-4127-ADBF-8D3F68AAD936}" type="slidenum">
               <a:rPr kumimoji="1" lang="ja-JP" altLang="en-US" smtClean="0"/>
               <a:t>‹#›</a:t>
             </a:fld>
@@ -1022,7 +1022,7 @@
     </p:spTree>
     <p:extLst>
       <p:ext uri="{BB962C8B-B14F-4D97-AF65-F5344CB8AC3E}">
-        <p14:creationId xmlns:p14="http://schemas.microsoft.com/office/powerpoint/2010/main" val="1258625047"/>
+        <p14:creationId xmlns:p14="http://schemas.microsoft.com/office/powerpoint/2010/main" val="544778849"/>
       </p:ext>
     </p:extLst>
   </p:cSld>
@@ -1054,7 +1054,7 @@
           <p:cNvPr id="2" name="タイトル 1">
             <a:extLst>
               <a:ext uri="{FF2B5EF4-FFF2-40B4-BE49-F238E27FC236}">
-                <a16:creationId xmlns:a16="http://schemas.microsoft.com/office/drawing/2014/main" id="{EEF3F2BD-4ED6-4047-FF04-670042D0BEAC}"/>
+                <a16:creationId xmlns:a16="http://schemas.microsoft.com/office/drawing/2014/main" id="{B31BA773-4E50-EA6B-0627-1971A3950751}"/>
               </a:ext>
             </a:extLst>
           </p:cNvPr>
@@ -1091,7 +1091,7 @@
           <p:cNvPr id="3" name="テキスト プレースホルダー 2">
             <a:extLst>
               <a:ext uri="{FF2B5EF4-FFF2-40B4-BE49-F238E27FC236}">
-                <a16:creationId xmlns:a16="http://schemas.microsoft.com/office/drawing/2014/main" id="{298624CE-5CB3-4B24-0017-0FCA98DC91EA}"/>
+                <a16:creationId xmlns:a16="http://schemas.microsoft.com/office/drawing/2014/main" id="{4D4C9473-65EB-8E46-ED0C-AC80B61BCE2C}"/>
               </a:ext>
             </a:extLst>
           </p:cNvPr>
@@ -1216,7 +1216,7 @@
           <p:cNvPr id="4" name="日付プレースホルダー 3">
             <a:extLst>
               <a:ext uri="{FF2B5EF4-FFF2-40B4-BE49-F238E27FC236}">
-                <a16:creationId xmlns:a16="http://schemas.microsoft.com/office/drawing/2014/main" id="{DD75CF33-7EED-FDF7-70B4-6B43F7E26998}"/>
+                <a16:creationId xmlns:a16="http://schemas.microsoft.com/office/drawing/2014/main" id="{74EE5D11-8011-6049-39F0-C8906EB7396B}"/>
               </a:ext>
             </a:extLst>
           </p:cNvPr>
@@ -1232,7 +1232,7 @@
           <a:bodyPr/>
           <a:lstStyle/>
           <a:p>
-            <a:fld id="{42D500CB-402E-49AC-BB5E-82D002147A17}" type="datetimeFigureOut">
+            <a:fld id="{7C5932AC-8A4A-4D44-A795-EB17C097D024}" type="datetimeFigureOut">
               <a:rPr kumimoji="1" lang="ja-JP" altLang="en-US" smtClean="0"/>
               <a:t>2026/7/30</a:t>
             </a:fld>
@@ -1245,7 +1245,7 @@
           <p:cNvPr id="5" name="フッター プレースホルダー 4">
             <a:extLst>
               <a:ext uri="{FF2B5EF4-FFF2-40B4-BE49-F238E27FC236}">
-                <a16:creationId xmlns:a16="http://schemas.microsoft.com/office/drawing/2014/main" id="{3202ABB8-C765-9341-E97F-D0937C8BB2E9}"/>
+                <a16:creationId xmlns:a16="http://schemas.microsoft.com/office/drawing/2014/main" id="{BD5C8E63-3526-E74E-F6B1-2E96270BA84A}"/>
               </a:ext>
             </a:extLst>
           </p:cNvPr>
@@ -1270,7 +1270,7 @@
           <p:cNvPr id="6" name="スライド番号プレースホルダー 5">
             <a:extLst>
               <a:ext uri="{FF2B5EF4-FFF2-40B4-BE49-F238E27FC236}">
-                <a16:creationId xmlns:a16="http://schemas.microsoft.com/office/drawing/2014/main" id="{E4B2DA45-ABF7-2B30-2897-140EEA83E74A}"/>
+                <a16:creationId xmlns:a16="http://schemas.microsoft.com/office/drawing/2014/main" id="{D247110D-EF8D-8DA2-E495-F2546040921A}"/>
               </a:ext>
             </a:extLst>
           </p:cNvPr>
@@ -1286,7 +1286,7 @@
           <a:bodyPr/>
           <a:lstStyle/>
           <a:p>
-            <a:fld id="{3F0B1D43-3968-46F5-A1AB-0CB50E424DD1}" type="slidenum">
+            <a:fld id="{79E68B47-8499-4127-ADBF-8D3F68AAD936}" type="slidenum">
               <a:rPr kumimoji="1" lang="ja-JP" altLang="en-US" smtClean="0"/>
               <a:t>‹#›</a:t>
             </a:fld>
@@ -1297,7 +1297,7 @@
     </p:spTree>
     <p:extLst>
       <p:ext uri="{BB962C8B-B14F-4D97-AF65-F5344CB8AC3E}">
-        <p14:creationId xmlns:p14="http://schemas.microsoft.com/office/powerpoint/2010/main" val="2441503042"/>
+        <p14:creationId xmlns:p14="http://schemas.microsoft.com/office/powerpoint/2010/main" val="1446156455"/>
       </p:ext>
     </p:extLst>
   </p:cSld>
@@ -1329,7 +1329,7 @@
           <p:cNvPr id="2" name="タイトル 1">
             <a:extLst>
               <a:ext uri="{FF2B5EF4-FFF2-40B4-BE49-F238E27FC236}">
-                <a16:creationId xmlns:a16="http://schemas.microsoft.com/office/drawing/2014/main" id="{DE8F7994-8BD5-6989-6825-66A615D9C70A}"/>
+                <a16:creationId xmlns:a16="http://schemas.microsoft.com/office/drawing/2014/main" id="{C647D55D-223C-7662-BAF3-2C460A498A3C}"/>
               </a:ext>
             </a:extLst>
           </p:cNvPr>
@@ -1357,7 +1357,7 @@
           <p:cNvPr id="3" name="コンテンツ プレースホルダー 2">
             <a:extLst>
               <a:ext uri="{FF2B5EF4-FFF2-40B4-BE49-F238E27FC236}">
-                <a16:creationId xmlns:a16="http://schemas.microsoft.com/office/drawing/2014/main" id="{48E2E462-813D-4742-968E-9BB943B9B458}"/>
+                <a16:creationId xmlns:a16="http://schemas.microsoft.com/office/drawing/2014/main" id="{44701CE8-193F-E0A8-F6F6-8F25EE3E0509}"/>
               </a:ext>
             </a:extLst>
           </p:cNvPr>
@@ -1451,7 +1451,7 @@
           <p:cNvPr id="4" name="コンテンツ プレースホルダー 3">
             <a:extLst>
               <a:ext uri="{FF2B5EF4-FFF2-40B4-BE49-F238E27FC236}">
-                <a16:creationId xmlns:a16="http://schemas.microsoft.com/office/drawing/2014/main" id="{AC91DED4-55BC-1757-1D75-57E3ADEF133E}"/>
+                <a16:creationId xmlns:a16="http://schemas.microsoft.com/office/drawing/2014/main" id="{21F16F35-B68E-C033-52CB-5AC205A68BA8}"/>
               </a:ext>
             </a:extLst>
           </p:cNvPr>
@@ -1545,7 +1545,7 @@
           <p:cNvPr id="5" name="日付プレースホルダー 4">
             <a:extLst>
               <a:ext uri="{FF2B5EF4-FFF2-40B4-BE49-F238E27FC236}">
-                <a16:creationId xmlns:a16="http://schemas.microsoft.com/office/drawing/2014/main" id="{E0D8F88F-53BA-80DF-62BE-4CAD7406AA9A}"/>
+                <a16:creationId xmlns:a16="http://schemas.microsoft.com/office/drawing/2014/main" id="{17917177-7CB9-2008-6C45-0F9FBF7FC0F1}"/>
               </a:ext>
             </a:extLst>
           </p:cNvPr>
@@ -1561,7 +1561,7 @@
           <a:bodyPr/>
           <a:lstStyle/>
           <a:p>
-            <a:fld id="{42D500CB-402E-49AC-BB5E-82D002147A17}" type="datetimeFigureOut">
+            <a:fld id="{7C5932AC-8A4A-4D44-A795-EB17C097D024}" type="datetimeFigureOut">
               <a:rPr kumimoji="1" lang="ja-JP" altLang="en-US" smtClean="0"/>
               <a:t>2026/7/30</a:t>
             </a:fld>
@@ -1574,7 +1574,7 @@
           <p:cNvPr id="6" name="フッター プレースホルダー 5">
             <a:extLst>
               <a:ext uri="{FF2B5EF4-FFF2-40B4-BE49-F238E27FC236}">
-                <a16:creationId xmlns:a16="http://schemas.microsoft.com/office/drawing/2014/main" id="{70C1D1A7-7666-9E89-A732-3864EDAAA82F}"/>
+                <a16:creationId xmlns:a16="http://schemas.microsoft.com/office/drawing/2014/main" id="{F624256C-A898-0C8B-FEBC-2A1F37BA3AB4}"/>
               </a:ext>
             </a:extLst>
           </p:cNvPr>
@@ -1599,7 +1599,7 @@
           <p:cNvPr id="7" name="スライド番号プレースホルダー 6">
             <a:extLst>
               <a:ext uri="{FF2B5EF4-FFF2-40B4-BE49-F238E27FC236}">
-                <a16:creationId xmlns:a16="http://schemas.microsoft.com/office/drawing/2014/main" id="{9DEDBEB6-73ED-7AB6-5542-EE91DB306F5A}"/>
+                <a16:creationId xmlns:a16="http://schemas.microsoft.com/office/drawing/2014/main" id="{694E7EFF-87E2-B300-8441-FC07D5C1D351}"/>
               </a:ext>
             </a:extLst>
           </p:cNvPr>
@@ -1615,7 +1615,7 @@
           <a:bodyPr/>
           <a:lstStyle/>
           <a:p>
-            <a:fld id="{3F0B1D43-3968-46F5-A1AB-0CB50E424DD1}" type="slidenum">
+            <a:fld id="{79E68B47-8499-4127-ADBF-8D3F68AAD936}" type="slidenum">
               <a:rPr kumimoji="1" lang="ja-JP" altLang="en-US" smtClean="0"/>
               <a:t>‹#›</a:t>
             </a:fld>
@@ -1626,7 +1626,7 @@
     </p:spTree>
     <p:extLst>
       <p:ext uri="{BB962C8B-B14F-4D97-AF65-F5344CB8AC3E}">
-        <p14:creationId xmlns:p14="http://schemas.microsoft.com/office/powerpoint/2010/main" val="2177591252"/>
+        <p14:creationId xmlns:p14="http://schemas.microsoft.com/office/powerpoint/2010/main" val="64556216"/>
       </p:ext>
     </p:extLst>
   </p:cSld>
@@ -1658,7 +1658,7 @@
           <p:cNvPr id="2" name="タイトル 1">
             <a:extLst>
               <a:ext uri="{FF2B5EF4-FFF2-40B4-BE49-F238E27FC236}">
-                <a16:creationId xmlns:a16="http://schemas.microsoft.com/office/drawing/2014/main" id="{63F5CF24-BCC9-2E4D-96FD-5DA7DDA9F360}"/>
+                <a16:creationId xmlns:a16="http://schemas.microsoft.com/office/drawing/2014/main" id="{93B33371-FE45-BD11-9101-9F1215BFDC10}"/>
               </a:ext>
             </a:extLst>
           </p:cNvPr>
@@ -1691,7 +1691,7 @@
           <p:cNvPr id="3" name="テキスト プレースホルダー 2">
             <a:extLst>
               <a:ext uri="{FF2B5EF4-FFF2-40B4-BE49-F238E27FC236}">
-                <a16:creationId xmlns:a16="http://schemas.microsoft.com/office/drawing/2014/main" id="{545C6400-0ED2-A775-26A7-713517EBCDD6}"/>
+                <a16:creationId xmlns:a16="http://schemas.microsoft.com/office/drawing/2014/main" id="{E7D26398-11F5-8D8C-2FED-BC82E5B0E524}"/>
               </a:ext>
             </a:extLst>
           </p:cNvPr>
@@ -1762,7 +1762,7 @@
           <p:cNvPr id="4" name="コンテンツ プレースホルダー 3">
             <a:extLst>
               <a:ext uri="{FF2B5EF4-FFF2-40B4-BE49-F238E27FC236}">
-                <a16:creationId xmlns:a16="http://schemas.microsoft.com/office/drawing/2014/main" id="{D194FD89-5CFC-229D-AB89-1001F1B8EEF3}"/>
+                <a16:creationId xmlns:a16="http://schemas.microsoft.com/office/drawing/2014/main" id="{624E685E-A66E-DDAD-59C7-20371EC9A6EB}"/>
               </a:ext>
             </a:extLst>
           </p:cNvPr>
@@ -1856,7 +1856,7 @@
           <p:cNvPr id="5" name="テキスト プレースホルダー 4">
             <a:extLst>
               <a:ext uri="{FF2B5EF4-FFF2-40B4-BE49-F238E27FC236}">
-                <a16:creationId xmlns:a16="http://schemas.microsoft.com/office/drawing/2014/main" id="{1D771181-ED3F-0B85-C76E-B9590ABBA2B9}"/>
+                <a16:creationId xmlns:a16="http://schemas.microsoft.com/office/drawing/2014/main" id="{2A95711D-67F8-95A2-C051-A1D26C158585}"/>
               </a:ext>
             </a:extLst>
           </p:cNvPr>
@@ -1927,7 +1927,7 @@
           <p:cNvPr id="6" name="コンテンツ プレースホルダー 5">
             <a:extLst>
               <a:ext uri="{FF2B5EF4-FFF2-40B4-BE49-F238E27FC236}">
-                <a16:creationId xmlns:a16="http://schemas.microsoft.com/office/drawing/2014/main" id="{15800234-67A3-6AC3-5899-43C58D62F43D}"/>
+                <a16:creationId xmlns:a16="http://schemas.microsoft.com/office/drawing/2014/main" id="{11374D3E-CC82-CDF6-FEB7-00C6FF7F8C1C}"/>
               </a:ext>
             </a:extLst>
           </p:cNvPr>
@@ -2021,7 +2021,7 @@
           <p:cNvPr id="7" name="日付プレースホルダー 6">
             <a:extLst>
               <a:ext uri="{FF2B5EF4-FFF2-40B4-BE49-F238E27FC236}">
-                <a16:creationId xmlns:a16="http://schemas.microsoft.com/office/drawing/2014/main" id="{56AEE067-B977-BF13-7060-25E3553FBA59}"/>
+                <a16:creationId xmlns:a16="http://schemas.microsoft.com/office/drawing/2014/main" id="{D05515E6-FF4F-AEC6-DF65-5104FC5A476C}"/>
               </a:ext>
             </a:extLst>
           </p:cNvPr>
@@ -2037,7 +2037,7 @@
           <a:bodyPr/>
           <a:lstStyle/>
           <a:p>
-            <a:fld id="{42D500CB-402E-49AC-BB5E-82D002147A17}" type="datetimeFigureOut">
+            <a:fld id="{7C5932AC-8A4A-4D44-A795-EB17C097D024}" type="datetimeFigureOut">
               <a:rPr kumimoji="1" lang="ja-JP" altLang="en-US" smtClean="0"/>
               <a:t>2026/7/30</a:t>
             </a:fld>
@@ -2050,7 +2050,7 @@
           <p:cNvPr id="8" name="フッター プレースホルダー 7">
             <a:extLst>
               <a:ext uri="{FF2B5EF4-FFF2-40B4-BE49-F238E27FC236}">
-                <a16:creationId xmlns:a16="http://schemas.microsoft.com/office/drawing/2014/main" id="{E93C1096-6296-B033-95BC-AE59AFA00368}"/>
+                <a16:creationId xmlns:a16="http://schemas.microsoft.com/office/drawing/2014/main" id="{09B17DCC-7592-6A15-B647-E04F8A0CA197}"/>
               </a:ext>
             </a:extLst>
           </p:cNvPr>
@@ -2075,7 +2075,7 @@
           <p:cNvPr id="9" name="スライド番号プレースホルダー 8">
             <a:extLst>
               <a:ext uri="{FF2B5EF4-FFF2-40B4-BE49-F238E27FC236}">
-                <a16:creationId xmlns:a16="http://schemas.microsoft.com/office/drawing/2014/main" id="{8810D557-8165-2035-1238-D2F9DE7534FA}"/>
+                <a16:creationId xmlns:a16="http://schemas.microsoft.com/office/drawing/2014/main" id="{D4E87FD5-C7ED-3734-2940-97D6EA7CDEE9}"/>
               </a:ext>
             </a:extLst>
           </p:cNvPr>
@@ -2091,7 +2091,7 @@
           <a:bodyPr/>
           <a:lstStyle/>
           <a:p>
-            <a:fld id="{3F0B1D43-3968-46F5-A1AB-0CB50E424DD1}" type="slidenum">
+            <a:fld id="{79E68B47-8499-4127-ADBF-8D3F68AAD936}" type="slidenum">
               <a:rPr kumimoji="1" lang="ja-JP" altLang="en-US" smtClean="0"/>
               <a:t>‹#›</a:t>
             </a:fld>
@@ -2102,7 +2102,7 @@
     </p:spTree>
     <p:extLst>
       <p:ext uri="{BB962C8B-B14F-4D97-AF65-F5344CB8AC3E}">
-        <p14:creationId xmlns:p14="http://schemas.microsoft.com/office/powerpoint/2010/main" val="181276539"/>
+        <p14:creationId xmlns:p14="http://schemas.microsoft.com/office/powerpoint/2010/main" val="2053775109"/>
       </p:ext>
     </p:extLst>
   </p:cSld>
@@ -2134,7 +2134,7 @@
           <p:cNvPr id="2" name="タイトル 1">
             <a:extLst>
               <a:ext uri="{FF2B5EF4-FFF2-40B4-BE49-F238E27FC236}">
-                <a16:creationId xmlns:a16="http://schemas.microsoft.com/office/drawing/2014/main" id="{37679E18-3382-627C-BDBB-7002502E79E1}"/>
+                <a16:creationId xmlns:a16="http://schemas.microsoft.com/office/drawing/2014/main" id="{4158D9B5-CFF6-4B42-4C12-F83A1EFC7BBE}"/>
               </a:ext>
             </a:extLst>
           </p:cNvPr>
@@ -2162,7 +2162,7 @@
           <p:cNvPr id="3" name="日付プレースホルダー 2">
             <a:extLst>
               <a:ext uri="{FF2B5EF4-FFF2-40B4-BE49-F238E27FC236}">
-                <a16:creationId xmlns:a16="http://schemas.microsoft.com/office/drawing/2014/main" id="{9F0A06BE-ED9F-5767-BAD3-FC1C15061BBA}"/>
+                <a16:creationId xmlns:a16="http://schemas.microsoft.com/office/drawing/2014/main" id="{2A395E2D-CCE3-04B6-0263-0406BBB9A8CE}"/>
               </a:ext>
             </a:extLst>
           </p:cNvPr>
@@ -2178,7 +2178,7 @@
           <a:bodyPr/>
           <a:lstStyle/>
           <a:p>
-            <a:fld id="{42D500CB-402E-49AC-BB5E-82D002147A17}" type="datetimeFigureOut">
+            <a:fld id="{7C5932AC-8A4A-4D44-A795-EB17C097D024}" type="datetimeFigureOut">
               <a:rPr kumimoji="1" lang="ja-JP" altLang="en-US" smtClean="0"/>
               <a:t>2026/7/30</a:t>
             </a:fld>
@@ -2191,7 +2191,7 @@
           <p:cNvPr id="4" name="フッター プレースホルダー 3">
             <a:extLst>
               <a:ext uri="{FF2B5EF4-FFF2-40B4-BE49-F238E27FC236}">
-                <a16:creationId xmlns:a16="http://schemas.microsoft.com/office/drawing/2014/main" id="{33486B63-0C83-6AC5-D221-139A13085390}"/>
+                <a16:creationId xmlns:a16="http://schemas.microsoft.com/office/drawing/2014/main" id="{6F86B39A-01D6-73C7-7184-5E3D5ADE64ED}"/>
               </a:ext>
             </a:extLst>
           </p:cNvPr>
@@ -2216,7 +2216,7 @@
           <p:cNvPr id="5" name="スライド番号プレースホルダー 4">
             <a:extLst>
               <a:ext uri="{FF2B5EF4-FFF2-40B4-BE49-F238E27FC236}">
-                <a16:creationId xmlns:a16="http://schemas.microsoft.com/office/drawing/2014/main" id="{D7ABDF04-DD22-1BEC-AC90-307D07174EF6}"/>
+                <a16:creationId xmlns:a16="http://schemas.microsoft.com/office/drawing/2014/main" id="{37B82DB9-4994-ADD5-D246-AF1915BB2506}"/>
               </a:ext>
             </a:extLst>
           </p:cNvPr>
@@ -2232,7 +2232,7 @@
           <a:bodyPr/>
           <a:lstStyle/>
           <a:p>
-            <a:fld id="{3F0B1D43-3968-46F5-A1AB-0CB50E424DD1}" type="slidenum">
+            <a:fld id="{79E68B47-8499-4127-ADBF-8D3F68AAD936}" type="slidenum">
               <a:rPr kumimoji="1" lang="ja-JP" altLang="en-US" smtClean="0"/>
               <a:t>‹#›</a:t>
             </a:fld>
@@ -2243,7 +2243,7 @@
     </p:spTree>
     <p:extLst>
       <p:ext uri="{BB962C8B-B14F-4D97-AF65-F5344CB8AC3E}">
-        <p14:creationId xmlns:p14="http://schemas.microsoft.com/office/powerpoint/2010/main" val="2060460742"/>
+        <p14:creationId xmlns:p14="http://schemas.microsoft.com/office/powerpoint/2010/main" val="1321867325"/>
       </p:ext>
     </p:extLst>
   </p:cSld>
@@ -2275,7 +2275,7 @@
           <p:cNvPr id="2" name="日付プレースホルダー 1">
             <a:extLst>
               <a:ext uri="{FF2B5EF4-FFF2-40B4-BE49-F238E27FC236}">
-                <a16:creationId xmlns:a16="http://schemas.microsoft.com/office/drawing/2014/main" id="{B6413FE4-2E21-7777-EDFD-91B1D6654AB2}"/>
+                <a16:creationId xmlns:a16="http://schemas.microsoft.com/office/drawing/2014/main" id="{459FF550-D5FD-AC2D-77B0-1091E8704DD3}"/>
               </a:ext>
             </a:extLst>
           </p:cNvPr>
@@ -2291,7 +2291,7 @@
           <a:bodyPr/>
           <a:lstStyle/>
           <a:p>
-            <a:fld id="{42D500CB-402E-49AC-BB5E-82D002147A17}" type="datetimeFigureOut">
+            <a:fld id="{7C5932AC-8A4A-4D44-A795-EB17C097D024}" type="datetimeFigureOut">
               <a:rPr kumimoji="1" lang="ja-JP" altLang="en-US" smtClean="0"/>
               <a:t>2026/7/30</a:t>
             </a:fld>
@@ -2304,7 +2304,7 @@
           <p:cNvPr id="3" name="フッター プレースホルダー 2">
             <a:extLst>
               <a:ext uri="{FF2B5EF4-FFF2-40B4-BE49-F238E27FC236}">
-                <a16:creationId xmlns:a16="http://schemas.microsoft.com/office/drawing/2014/main" id="{B0670889-7C0B-6240-4951-B07C9DA39923}"/>
+                <a16:creationId xmlns:a16="http://schemas.microsoft.com/office/drawing/2014/main" id="{7327C43F-69BA-D4E9-ABDF-7BC74C9A45D6}"/>
               </a:ext>
             </a:extLst>
           </p:cNvPr>
@@ -2329,7 +2329,7 @@
           <p:cNvPr id="4" name="スライド番号プレースホルダー 3">
             <a:extLst>
               <a:ext uri="{FF2B5EF4-FFF2-40B4-BE49-F238E27FC236}">
-                <a16:creationId xmlns:a16="http://schemas.microsoft.com/office/drawing/2014/main" id="{9B84DAA4-E53A-5030-1FF1-9B545EB81884}"/>
+                <a16:creationId xmlns:a16="http://schemas.microsoft.com/office/drawing/2014/main" id="{D5BC859A-D846-4A9C-100C-55F52508A376}"/>
               </a:ext>
             </a:extLst>
           </p:cNvPr>
@@ -2345,7 +2345,7 @@
           <a:bodyPr/>
           <a:lstStyle/>
           <a:p>
-            <a:fld id="{3F0B1D43-3968-46F5-A1AB-0CB50E424DD1}" type="slidenum">
+            <a:fld id="{79E68B47-8499-4127-ADBF-8D3F68AAD936}" type="slidenum">
               <a:rPr kumimoji="1" lang="ja-JP" altLang="en-US" smtClean="0"/>
               <a:t>‹#›</a:t>
             </a:fld>
@@ -2356,7 +2356,7 @@
     </p:spTree>
     <p:extLst>
       <p:ext uri="{BB962C8B-B14F-4D97-AF65-F5344CB8AC3E}">
-        <p14:creationId xmlns:p14="http://schemas.microsoft.com/office/powerpoint/2010/main" val="1495861551"/>
+        <p14:creationId xmlns:p14="http://schemas.microsoft.com/office/powerpoint/2010/main" val="2497985491"/>
       </p:ext>
     </p:extLst>
   </p:cSld>
@@ -2388,7 +2388,7 @@
           <p:cNvPr id="2" name="タイトル 1">
             <a:extLst>
               <a:ext uri="{FF2B5EF4-FFF2-40B4-BE49-F238E27FC236}">
-                <a16:creationId xmlns:a16="http://schemas.microsoft.com/office/drawing/2014/main" id="{93C08253-351C-9B6F-EB87-3A512A77E60F}"/>
+                <a16:creationId xmlns:a16="http://schemas.microsoft.com/office/drawing/2014/main" id="{5E930D5C-2311-3E16-EBA9-407103CA3B2D}"/>
               </a:ext>
             </a:extLst>
           </p:cNvPr>
@@ -2425,7 +2425,7 @@
           <p:cNvPr id="3" name="コンテンツ プレースホルダー 2">
             <a:extLst>
               <a:ext uri="{FF2B5EF4-FFF2-40B4-BE49-F238E27FC236}">
-                <a16:creationId xmlns:a16="http://schemas.microsoft.com/office/drawing/2014/main" id="{7AA597DE-F4DA-1557-5B01-2B7A5A051E1B}"/>
+                <a16:creationId xmlns:a16="http://schemas.microsoft.com/office/drawing/2014/main" id="{3537D2C2-B4A6-2143-6241-1957A7C05B16}"/>
               </a:ext>
             </a:extLst>
           </p:cNvPr>
@@ -2547,7 +2547,7 @@
           <p:cNvPr id="4" name="テキスト プレースホルダー 3">
             <a:extLst>
               <a:ext uri="{FF2B5EF4-FFF2-40B4-BE49-F238E27FC236}">
-                <a16:creationId xmlns:a16="http://schemas.microsoft.com/office/drawing/2014/main" id="{DD7DD733-3947-105E-D89F-0AF3BDFFA7C7}"/>
+                <a16:creationId xmlns:a16="http://schemas.microsoft.com/office/drawing/2014/main" id="{D4FB13BD-E809-882A-C013-B6BF9080024D}"/>
               </a:ext>
             </a:extLst>
           </p:cNvPr>
@@ -2618,7 +2618,7 @@
           <p:cNvPr id="5" name="日付プレースホルダー 4">
             <a:extLst>
               <a:ext uri="{FF2B5EF4-FFF2-40B4-BE49-F238E27FC236}">
-                <a16:creationId xmlns:a16="http://schemas.microsoft.com/office/drawing/2014/main" id="{41E0C4AA-A0FC-01DD-4C54-08841E1EC102}"/>
+                <a16:creationId xmlns:a16="http://schemas.microsoft.com/office/drawing/2014/main" id="{7A3D6932-C124-9929-60D3-EF97830F5081}"/>
               </a:ext>
             </a:extLst>
           </p:cNvPr>
@@ -2634,7 +2634,7 @@
           <a:bodyPr/>
           <a:lstStyle/>
           <a:p>
-            <a:fld id="{42D500CB-402E-49AC-BB5E-82D002147A17}" type="datetimeFigureOut">
+            <a:fld id="{7C5932AC-8A4A-4D44-A795-EB17C097D024}" type="datetimeFigureOut">
               <a:rPr kumimoji="1" lang="ja-JP" altLang="en-US" smtClean="0"/>
               <a:t>2026/7/30</a:t>
             </a:fld>
@@ -2647,7 +2647,7 @@
           <p:cNvPr id="6" name="フッター プレースホルダー 5">
             <a:extLst>
               <a:ext uri="{FF2B5EF4-FFF2-40B4-BE49-F238E27FC236}">
-                <a16:creationId xmlns:a16="http://schemas.microsoft.com/office/drawing/2014/main" id="{57BFC34B-BCE5-8DA3-18BC-6442F0A09B46}"/>
+                <a16:creationId xmlns:a16="http://schemas.microsoft.com/office/drawing/2014/main" id="{BD70D319-3F98-D847-4C7D-2D79EFEBFF30}"/>
               </a:ext>
             </a:extLst>
           </p:cNvPr>
@@ -2672,7 +2672,7 @@
           <p:cNvPr id="7" name="スライド番号プレースホルダー 6">
             <a:extLst>
               <a:ext uri="{FF2B5EF4-FFF2-40B4-BE49-F238E27FC236}">
-                <a16:creationId xmlns:a16="http://schemas.microsoft.com/office/drawing/2014/main" id="{1FBBF538-F1FA-5C31-56E6-46F9DAC89827}"/>
+                <a16:creationId xmlns:a16="http://schemas.microsoft.com/office/drawing/2014/main" id="{7AFF7460-108D-AACB-4489-A7AA71361C9C}"/>
               </a:ext>
             </a:extLst>
           </p:cNvPr>
@@ -2688,7 +2688,7 @@
           <a:bodyPr/>
           <a:lstStyle/>
           <a:p>
-            <a:fld id="{3F0B1D43-3968-46F5-A1AB-0CB50E424DD1}" type="slidenum">
+            <a:fld id="{79E68B47-8499-4127-ADBF-8D3F68AAD936}" type="slidenum">
               <a:rPr kumimoji="1" lang="ja-JP" altLang="en-US" smtClean="0"/>
               <a:t>‹#›</a:t>
             </a:fld>
@@ -2699,7 +2699,7 @@
     </p:spTree>
     <p:extLst>
       <p:ext uri="{BB962C8B-B14F-4D97-AF65-F5344CB8AC3E}">
-        <p14:creationId xmlns:p14="http://schemas.microsoft.com/office/powerpoint/2010/main" val="4153604030"/>
+        <p14:creationId xmlns:p14="http://schemas.microsoft.com/office/powerpoint/2010/main" val="2672357928"/>
       </p:ext>
     </p:extLst>
   </p:cSld>
@@ -2731,7 +2731,7 @@
           <p:cNvPr id="2" name="タイトル 1">
             <a:extLst>
               <a:ext uri="{FF2B5EF4-FFF2-40B4-BE49-F238E27FC236}">
-                <a16:creationId xmlns:a16="http://schemas.microsoft.com/office/drawing/2014/main" id="{5B87A9B6-C2CF-6B5C-6C61-89BA1CD03C18}"/>
+                <a16:creationId xmlns:a16="http://schemas.microsoft.com/office/drawing/2014/main" id="{F94518F2-B100-86BD-BAA4-E5CCEBE990D7}"/>
               </a:ext>
             </a:extLst>
           </p:cNvPr>
@@ -2768,7 +2768,7 @@
           <p:cNvPr id="3" name="図プレースホルダー 2">
             <a:extLst>
               <a:ext uri="{FF2B5EF4-FFF2-40B4-BE49-F238E27FC236}">
-                <a16:creationId xmlns:a16="http://schemas.microsoft.com/office/drawing/2014/main" id="{C04CCA73-4556-6A9E-79CF-4990B2D79D08}"/>
+                <a16:creationId xmlns:a16="http://schemas.microsoft.com/office/drawing/2014/main" id="{25133C09-E3DE-ECB1-D2C2-B792654F7B74}"/>
               </a:ext>
             </a:extLst>
           </p:cNvPr>
@@ -2835,7 +2835,7 @@
           <p:cNvPr id="4" name="テキスト プレースホルダー 3">
             <a:extLst>
               <a:ext uri="{FF2B5EF4-FFF2-40B4-BE49-F238E27FC236}">
-                <a16:creationId xmlns:a16="http://schemas.microsoft.com/office/drawing/2014/main" id="{F0817630-2674-874A-E51F-C5EE58C72B3F}"/>
+                <a16:creationId xmlns:a16="http://schemas.microsoft.com/office/drawing/2014/main" id="{15B59ADE-564E-4830-1749-BD53C8645545}"/>
               </a:ext>
             </a:extLst>
           </p:cNvPr>
@@ -2906,7 +2906,7 @@
           <p:cNvPr id="5" name="日付プレースホルダー 4">
             <a:extLst>
               <a:ext uri="{FF2B5EF4-FFF2-40B4-BE49-F238E27FC236}">
-                <a16:creationId xmlns:a16="http://schemas.microsoft.com/office/drawing/2014/main" id="{8360CDD6-4B46-8E1A-1DA7-04D6489A3C4B}"/>
+                <a16:creationId xmlns:a16="http://schemas.microsoft.com/office/drawing/2014/main" id="{3A0D0A4D-0F71-EE40-6FA0-6AEA9B12B797}"/>
               </a:ext>
             </a:extLst>
           </p:cNvPr>
@@ -2922,7 +2922,7 @@
           <a:bodyPr/>
           <a:lstStyle/>
           <a:p>
-            <a:fld id="{42D500CB-402E-49AC-BB5E-82D002147A17}" type="datetimeFigureOut">
+            <a:fld id="{7C5932AC-8A4A-4D44-A795-EB17C097D024}" type="datetimeFigureOut">
               <a:rPr kumimoji="1" lang="ja-JP" altLang="en-US" smtClean="0"/>
               <a:t>2026/7/30</a:t>
             </a:fld>
@@ -2935,7 +2935,7 @@
           <p:cNvPr id="6" name="フッター プレースホルダー 5">
             <a:extLst>
               <a:ext uri="{FF2B5EF4-FFF2-40B4-BE49-F238E27FC236}">
-                <a16:creationId xmlns:a16="http://schemas.microsoft.com/office/drawing/2014/main" id="{76B4B94D-BC4F-BA34-9106-4467456812B1}"/>
+                <a16:creationId xmlns:a16="http://schemas.microsoft.com/office/drawing/2014/main" id="{4F801928-6475-04DB-700C-795589367276}"/>
               </a:ext>
             </a:extLst>
           </p:cNvPr>
@@ -2960,7 +2960,7 @@
           <p:cNvPr id="7" name="スライド番号プレースホルダー 6">
             <a:extLst>
               <a:ext uri="{FF2B5EF4-FFF2-40B4-BE49-F238E27FC236}">
-                <a16:creationId xmlns:a16="http://schemas.microsoft.com/office/drawing/2014/main" id="{E07E1D7E-F874-9FE9-578F-D3980BE63475}"/>
+                <a16:creationId xmlns:a16="http://schemas.microsoft.com/office/drawing/2014/main" id="{BC6D3749-12C7-D1BD-17B1-465CD9E4C577}"/>
               </a:ext>
             </a:extLst>
           </p:cNvPr>
@@ -2976,7 +2976,7 @@
           <a:bodyPr/>
           <a:lstStyle/>
           <a:p>
-            <a:fld id="{3F0B1D43-3968-46F5-A1AB-0CB50E424DD1}" type="slidenum">
+            <a:fld id="{79E68B47-8499-4127-ADBF-8D3F68AAD936}" type="slidenum">
               <a:rPr kumimoji="1" lang="ja-JP" altLang="en-US" smtClean="0"/>
               <a:t>‹#›</a:t>
             </a:fld>
@@ -2987,7 +2987,7 @@
     </p:spTree>
     <p:extLst>
       <p:ext uri="{BB962C8B-B14F-4D97-AF65-F5344CB8AC3E}">
-        <p14:creationId xmlns:p14="http://schemas.microsoft.com/office/powerpoint/2010/main" val="1139783183"/>
+        <p14:creationId xmlns:p14="http://schemas.microsoft.com/office/powerpoint/2010/main" val="2135364195"/>
       </p:ext>
     </p:extLst>
   </p:cSld>
@@ -3024,7 +3024,7 @@
           <p:cNvPr id="2" name="タイトル プレースホルダー 1">
             <a:extLst>
               <a:ext uri="{FF2B5EF4-FFF2-40B4-BE49-F238E27FC236}">
-                <a16:creationId xmlns:a16="http://schemas.microsoft.com/office/drawing/2014/main" id="{8824B940-C44E-F8A1-1FC8-713FB319F75F}"/>
+                <a16:creationId xmlns:a16="http://schemas.microsoft.com/office/drawing/2014/main" id="{95BE24EF-966C-8CF7-7A37-E17085141F71}"/>
               </a:ext>
             </a:extLst>
           </p:cNvPr>
@@ -3062,7 +3062,7 @@
           <p:cNvPr id="3" name="テキスト プレースホルダー 2">
             <a:extLst>
               <a:ext uri="{FF2B5EF4-FFF2-40B4-BE49-F238E27FC236}">
-                <a16:creationId xmlns:a16="http://schemas.microsoft.com/office/drawing/2014/main" id="{254CC21A-3CDE-880E-5A25-5BCCF8A9B5BB}"/>
+                <a16:creationId xmlns:a16="http://schemas.microsoft.com/office/drawing/2014/main" id="{6A34043B-7CA6-89B3-46BF-1736754C393D}"/>
               </a:ext>
             </a:extLst>
           </p:cNvPr>
@@ -3161,7 +3161,7 @@
           <p:cNvPr id="4" name="日付プレースホルダー 3">
             <a:extLst>
               <a:ext uri="{FF2B5EF4-FFF2-40B4-BE49-F238E27FC236}">
-                <a16:creationId xmlns:a16="http://schemas.microsoft.com/office/drawing/2014/main" id="{0586C25A-15F1-D360-6BA9-6411467DC10C}"/>
+                <a16:creationId xmlns:a16="http://schemas.microsoft.com/office/drawing/2014/main" id="{95CD8A5F-BB0D-1742-7DD3-0DAFD608BEBF}"/>
               </a:ext>
             </a:extLst>
           </p:cNvPr>
@@ -3195,7 +3195,7 @@
             </a:lvl1pPr>
           </a:lstStyle>
           <a:p>
-            <a:fld id="{42D500CB-402E-49AC-BB5E-82D002147A17}" type="datetimeFigureOut">
+            <a:fld id="{7C5932AC-8A4A-4D44-A795-EB17C097D024}" type="datetimeFigureOut">
               <a:rPr kumimoji="1" lang="ja-JP" altLang="en-US" smtClean="0"/>
               <a:t>2026/7/30</a:t>
             </a:fld>
@@ -3208,7 +3208,7 @@
           <p:cNvPr id="5" name="フッター プレースホルダー 4">
             <a:extLst>
               <a:ext uri="{FF2B5EF4-FFF2-40B4-BE49-F238E27FC236}">
-                <a16:creationId xmlns:a16="http://schemas.microsoft.com/office/drawing/2014/main" id="{4B946F6E-DD3C-C729-D85B-166B04A8243A}"/>
+                <a16:creationId xmlns:a16="http://schemas.microsoft.com/office/drawing/2014/main" id="{39161964-43D9-747C-B8F0-CF29AE89D964}"/>
               </a:ext>
             </a:extLst>
           </p:cNvPr>
@@ -3251,7 +3251,7 @@
           <p:cNvPr id="6" name="スライド番号プレースホルダー 5">
             <a:extLst>
               <a:ext uri="{FF2B5EF4-FFF2-40B4-BE49-F238E27FC236}">
-                <a16:creationId xmlns:a16="http://schemas.microsoft.com/office/drawing/2014/main" id="{A1D00BCE-D60E-8BD1-81FA-D2E6687A70D8}"/>
+                <a16:creationId xmlns:a16="http://schemas.microsoft.com/office/drawing/2014/main" id="{0D3BD638-DED4-ECFE-86E9-D36653B8B610}"/>
               </a:ext>
             </a:extLst>
           </p:cNvPr>
@@ -3285,7 +3285,7 @@
             </a:lvl1pPr>
           </a:lstStyle>
           <a:p>
-            <a:fld id="{3F0B1D43-3968-46F5-A1AB-0CB50E424DD1}" type="slidenum">
+            <a:fld id="{79E68B47-8499-4127-ADBF-8D3F68AAD936}" type="slidenum">
               <a:rPr kumimoji="1" lang="ja-JP" altLang="en-US" smtClean="0"/>
               <a:t>‹#›</a:t>
             </a:fld>
@@ -3296,7 +3296,7 @@
     </p:spTree>
     <p:extLst>
       <p:ext uri="{BB962C8B-B14F-4D97-AF65-F5344CB8AC3E}">
-        <p14:creationId xmlns:p14="http://schemas.microsoft.com/office/powerpoint/2010/main" val="3556441723"/>
+        <p14:creationId xmlns:p14="http://schemas.microsoft.com/office/powerpoint/2010/main" val="2642891677"/>
       </p:ext>
     </p:extLst>
   </p:cSld>
@@ -3619,7 +3619,7 @@
           <p:cNvPr id="2" name="テキスト ボックス 1">
             <a:extLst>
               <a:ext uri="{FF2B5EF4-FFF2-40B4-BE49-F238E27FC236}">
-                <a16:creationId xmlns:a16="http://schemas.microsoft.com/office/drawing/2014/main" id="{159E5816-E6DF-3514-5E46-212FB23BD9D2}"/>
+                <a16:creationId xmlns:a16="http://schemas.microsoft.com/office/drawing/2014/main" id="{2D8AA2F5-F018-E75B-95F9-F845CAB867FE}"/>
               </a:ext>
             </a:extLst>
           </p:cNvPr>
@@ -3665,7 +3665,7 @@
           <p:cNvPr id="3" name="テキスト ボックス 2">
             <a:extLst>
               <a:ext uri="{FF2B5EF4-FFF2-40B4-BE49-F238E27FC236}">
-                <a16:creationId xmlns:a16="http://schemas.microsoft.com/office/drawing/2014/main" id="{57E9BCF0-8EF7-392F-E586-13F2ED59AB42}"/>
+                <a16:creationId xmlns:a16="http://schemas.microsoft.com/office/drawing/2014/main" id="{971EB264-D4D3-AFB9-0272-E148078126A6}"/>
               </a:ext>
             </a:extLst>
           </p:cNvPr>
@@ -3695,14 +3695,17 @@
                 </a:solidFill>
                 <a:latin typeface="Arial" panose="020B0604020202020204" pitchFamily="34" charset="0"/>
               </a:rPr>
-              <a:t>reserve-serapi TECH EXPLANATION</a:t>
-            </a:r>
-            <a:endParaRPr kumimoji="1" lang="ja-JP" altLang="en-US" sz="3400" b="1">
-              <a:solidFill>
-                <a:srgbClr val="111111"/>
-              </a:solidFill>
-              <a:latin typeface="Arial" panose="020B0604020202020204" pitchFamily="34" charset="0"/>
-            </a:endParaRPr>
+              <a:t>Reserve Serapi</a:t>
+            </a:r>
+            <a:r>
+              <a:rPr kumimoji="1" lang="ja-JP" altLang="en-US" sz="3400" b="1">
+                <a:solidFill>
+                  <a:srgbClr val="111111"/>
+                </a:solidFill>
+                <a:latin typeface="Arial" panose="020B0604020202020204" pitchFamily="34" charset="0"/>
+              </a:rPr>
+              <a:t>の技術解説</a:t>
+            </a:r>
           </a:p>
         </p:txBody>
       </p:sp>
@@ -3711,7 +3714,7 @@
           <p:cNvPr id="4" name="テキスト ボックス 3">
             <a:extLst>
               <a:ext uri="{FF2B5EF4-FFF2-40B4-BE49-F238E27FC236}">
-                <a16:creationId xmlns:a16="http://schemas.microsoft.com/office/drawing/2014/main" id="{F939683B-EB4A-9133-E1E9-07E4174A1D22}"/>
+                <a16:creationId xmlns:a16="http://schemas.microsoft.com/office/drawing/2014/main" id="{757FA637-0085-7A82-DEB9-01EE026E40BD}"/>
               </a:ext>
             </a:extLst>
           </p:cNvPr>
@@ -3735,20 +3738,14 @@
           <a:lstStyle/>
           <a:p>
             <a:r>
-              <a:rPr kumimoji="1" lang="en-US" altLang="ja-JP" sz="2000">
+              <a:rPr kumimoji="1" lang="ja-JP" altLang="en-US" sz="2000">
                 <a:solidFill>
                   <a:srgbClr val="333333"/>
                 </a:solidFill>
                 <a:latin typeface="Arial" panose="020B0604020202020204" pitchFamily="34" charset="0"/>
               </a:rPr>
-              <a:t>Architecture, implementation and commit history in 75 seconds</a:t>
-            </a:r>
-            <a:endParaRPr kumimoji="1" lang="ja-JP" altLang="en-US" sz="2000">
-              <a:solidFill>
-                <a:srgbClr val="333333"/>
-              </a:solidFill>
-              <a:latin typeface="Arial" panose="020B0604020202020204" pitchFamily="34" charset="0"/>
-            </a:endParaRPr>
+              <a:t>設計・実装・コミットから学ぶ短時間プレビュー</a:t>
+            </a:r>
           </a:p>
         </p:txBody>
       </p:sp>
@@ -3757,7 +3754,7 @@
           <p:cNvPr id="5" name="テキスト ボックス 4">
             <a:extLst>
               <a:ext uri="{FF2B5EF4-FFF2-40B4-BE49-F238E27FC236}">
-                <a16:creationId xmlns:a16="http://schemas.microsoft.com/office/drawing/2014/main" id="{F878883B-1A07-92F2-A4CE-50793C376DD1}"/>
+                <a16:creationId xmlns:a16="http://schemas.microsoft.com/office/drawing/2014/main" id="{989EA8CC-D9C2-B144-C469-F123F2471941}"/>
               </a:ext>
             </a:extLst>
           </p:cNvPr>
@@ -3804,7 +3801,7 @@
             <a:hlinkClick r:id="" action="ppaction://media"/>
             <a:extLst>
               <a:ext uri="{FF2B5EF4-FFF2-40B4-BE49-F238E27FC236}">
-                <a16:creationId xmlns:a16="http://schemas.microsoft.com/office/drawing/2014/main" id="{19CFD106-6477-B272-AF79-FF9FF519883C}"/>
+                <a16:creationId xmlns:a16="http://schemas.microsoft.com/office/drawing/2014/main" id="{826D173B-C174-C4D7-D887-056A76AE1DA3}"/>
               </a:ext>
             </a:extLst>
           </p:cNvPr>
@@ -3839,7 +3836,7 @@
     </p:spTree>
     <p:extLst>
       <p:ext uri="{BB962C8B-B14F-4D97-AF65-F5344CB8AC3E}">
-        <p14:creationId xmlns:p14="http://schemas.microsoft.com/office/powerpoint/2010/main" val="593073473"/>
+        <p14:creationId xmlns:p14="http://schemas.microsoft.com/office/powerpoint/2010/main" val="3845014430"/>
       </p:ext>
     </p:extLst>
   </p:cSld>
@@ -3963,7 +3960,7 @@
           <p:cNvPr id="2" name="テキスト ボックス 1">
             <a:extLst>
               <a:ext uri="{FF2B5EF4-FFF2-40B4-BE49-F238E27FC236}">
-                <a16:creationId xmlns:a16="http://schemas.microsoft.com/office/drawing/2014/main" id="{7645D5B2-89EA-F212-7CE2-16FB24BAD21C}"/>
+                <a16:creationId xmlns:a16="http://schemas.microsoft.com/office/drawing/2014/main" id="{D5430FF5-115B-C0F1-C01D-3F71989E41AB}"/>
               </a:ext>
             </a:extLst>
           </p:cNvPr>
@@ -4009,7 +4006,7 @@
           <p:cNvPr id="3" name="テキスト ボックス 2">
             <a:extLst>
               <a:ext uri="{FF2B5EF4-FFF2-40B4-BE49-F238E27FC236}">
-                <a16:creationId xmlns:a16="http://schemas.microsoft.com/office/drawing/2014/main" id="{47607BC4-51F8-8F45-1421-60598999333D}"/>
+                <a16:creationId xmlns:a16="http://schemas.microsoft.com/office/drawing/2014/main" id="{266BB089-DFA3-0735-3866-497BFB3884D7}"/>
               </a:ext>
             </a:extLst>
           </p:cNvPr>
@@ -4033,20 +4030,14 @@
           <a:lstStyle/>
           <a:p>
             <a:r>
-              <a:rPr kumimoji="1" lang="en-US" altLang="ja-JP" sz="3400" b="1">
+              <a:rPr kumimoji="1" lang="ja-JP" altLang="en-US" sz="3400" b="1">
                 <a:solidFill>
                   <a:srgbClr val="111111"/>
                 </a:solidFill>
                 <a:latin typeface="Arial" panose="020B0604020202020204" pitchFamily="34" charset="0"/>
               </a:rPr>
-              <a:t>WHAT DOES IT SOLVE?</a:t>
-            </a:r>
-            <a:endParaRPr kumimoji="1" lang="ja-JP" altLang="en-US" sz="3400" b="1">
-              <a:solidFill>
-                <a:srgbClr val="111111"/>
-              </a:solidFill>
-              <a:latin typeface="Arial" panose="020B0604020202020204" pitchFamily="34" charset="0"/>
-            </a:endParaRPr>
+              <a:t>このプロジェクトは何を解決する？</a:t>
+            </a:r>
           </a:p>
         </p:txBody>
       </p:sp>
@@ -4055,7 +4046,7 @@
           <p:cNvPr id="4" name="テキスト ボックス 3">
             <a:extLst>
               <a:ext uri="{FF2B5EF4-FFF2-40B4-BE49-F238E27FC236}">
-                <a16:creationId xmlns:a16="http://schemas.microsoft.com/office/drawing/2014/main" id="{E9B9B2E6-2DEB-962C-C766-13657364D70A}"/>
+                <a16:creationId xmlns:a16="http://schemas.microsoft.com/office/drawing/2014/main" id="{6517A27C-92A3-6606-344A-562E20FC7BF9}"/>
               </a:ext>
             </a:extLst>
           </p:cNvPr>
@@ -4101,7 +4092,7 @@
           <p:cNvPr id="5" name="テキスト ボックス 4">
             <a:extLst>
               <a:ext uri="{FF2B5EF4-FFF2-40B4-BE49-F238E27FC236}">
-                <a16:creationId xmlns:a16="http://schemas.microsoft.com/office/drawing/2014/main" id="{601744B3-15E1-BA10-7CAE-9760B883027E}"/>
+                <a16:creationId xmlns:a16="http://schemas.microsoft.com/office/drawing/2014/main" id="{AEB7CEF9-03C0-72A5-6B8C-B0F4EF1FCBCA}"/>
               </a:ext>
             </a:extLst>
           </p:cNvPr>
@@ -4148,7 +4139,7 @@
             <a:hlinkClick r:id="" action="ppaction://media"/>
             <a:extLst>
               <a:ext uri="{FF2B5EF4-FFF2-40B4-BE49-F238E27FC236}">
-                <a16:creationId xmlns:a16="http://schemas.microsoft.com/office/drawing/2014/main" id="{65603243-5E19-9A11-BE42-485254C2B1A1}"/>
+                <a16:creationId xmlns:a16="http://schemas.microsoft.com/office/drawing/2014/main" id="{81ADCAE6-FE46-A675-E814-E9FE81951766}"/>
               </a:ext>
             </a:extLst>
           </p:cNvPr>
@@ -4183,7 +4174,7 @@
     </p:spTree>
     <p:extLst>
       <p:ext uri="{BB962C8B-B14F-4D97-AF65-F5344CB8AC3E}">
-        <p14:creationId xmlns:p14="http://schemas.microsoft.com/office/powerpoint/2010/main" val="2644577158"/>
+        <p14:creationId xmlns:p14="http://schemas.microsoft.com/office/powerpoint/2010/main" val="3538730658"/>
       </p:ext>
     </p:extLst>
   </p:cSld>
@@ -4307,7 +4298,7 @@
           <p:cNvPr id="2" name="テキスト ボックス 1">
             <a:extLst>
               <a:ext uri="{FF2B5EF4-FFF2-40B4-BE49-F238E27FC236}">
-                <a16:creationId xmlns:a16="http://schemas.microsoft.com/office/drawing/2014/main" id="{C8C5EF55-2C12-06E4-AB50-2FA1D572367F}"/>
+                <a16:creationId xmlns:a16="http://schemas.microsoft.com/office/drawing/2014/main" id="{95CE741F-494C-CA63-63A4-1B15411C7BF9}"/>
               </a:ext>
             </a:extLst>
           </p:cNvPr>
@@ -4353,7 +4344,7 @@
           <p:cNvPr id="3" name="テキスト ボックス 2">
             <a:extLst>
               <a:ext uri="{FF2B5EF4-FFF2-40B4-BE49-F238E27FC236}">
-                <a16:creationId xmlns:a16="http://schemas.microsoft.com/office/drawing/2014/main" id="{43648ECA-6D82-7449-FC64-E567041E0455}"/>
+                <a16:creationId xmlns:a16="http://schemas.microsoft.com/office/drawing/2014/main" id="{A0CB47C8-AF90-C912-357B-CDFB7CDF9AA2}"/>
               </a:ext>
             </a:extLst>
           </p:cNvPr>
@@ -4377,20 +4368,14 @@
           <a:lstStyle/>
           <a:p>
             <a:r>
-              <a:rPr kumimoji="1" lang="en-US" altLang="ja-JP" sz="3400" b="1">
+              <a:rPr kumimoji="1" lang="ja-JP" altLang="en-US" sz="3400" b="1">
                 <a:solidFill>
                   <a:srgbClr val="111111"/>
                 </a:solidFill>
                 <a:latin typeface="Arial" panose="020B0604020202020204" pitchFamily="34" charset="0"/>
               </a:rPr>
-              <a:t>TECH STACK</a:t>
-            </a:r>
-            <a:endParaRPr kumimoji="1" lang="ja-JP" altLang="en-US" sz="3400" b="1">
-              <a:solidFill>
-                <a:srgbClr val="111111"/>
-              </a:solidFill>
-              <a:latin typeface="Arial" panose="020B0604020202020204" pitchFamily="34" charset="0"/>
-            </a:endParaRPr>
+              <a:t>技術スタック</a:t>
+            </a:r>
           </a:p>
         </p:txBody>
       </p:sp>
@@ -4399,7 +4384,7 @@
           <p:cNvPr id="4" name="テキスト ボックス 3">
             <a:extLst>
               <a:ext uri="{FF2B5EF4-FFF2-40B4-BE49-F238E27FC236}">
-                <a16:creationId xmlns:a16="http://schemas.microsoft.com/office/drawing/2014/main" id="{FD906D5A-8C51-0F9B-FBB9-9815F17C95A2}"/>
+                <a16:creationId xmlns:a16="http://schemas.microsoft.com/office/drawing/2014/main" id="{34076638-2579-A659-7CFA-121402298090}"/>
               </a:ext>
             </a:extLst>
           </p:cNvPr>
@@ -4409,7 +4394,7 @@
         <p:spPr>
           <a:xfrm>
             <a:off x="533400" y="3429000"/>
-            <a:ext cx="10795000" cy="400110"/>
+            <a:ext cx="10795000" cy="707886"/>
           </a:xfrm>
           <a:prstGeom prst="rect">
             <a:avLst/>
@@ -4423,13 +4408,22 @@
           <a:lstStyle/>
           <a:p>
             <a:r>
+              <a:rPr kumimoji="1" lang="ja-JP" altLang="en-US" sz="2000">
+                <a:solidFill>
+                  <a:srgbClr val="333333"/>
+                </a:solidFill>
+                <a:latin typeface="Arial" panose="020B0604020202020204" pitchFamily="34" charset="0"/>
+              </a:rPr>
+              <a:t>主要技術：</a:t>
+            </a:r>
+            <a:r>
               <a:rPr kumimoji="1" lang="en-US" altLang="ja-JP" sz="2000">
                 <a:solidFill>
                   <a:srgbClr val="333333"/>
                 </a:solidFill>
                 <a:latin typeface="Arial" panose="020B0604020202020204" pitchFamily="34" charset="0"/>
               </a:rPr>
-              <a:t>Primary technologies: TypeScript</a:t>
+              <a:t>TypeScript</a:t>
             </a:r>
             <a:r>
               <a:rPr kumimoji="1" lang="ja-JP" altLang="en-US" sz="2000">
@@ -4465,14 +4459,18 @@
                 </a:solidFill>
                 <a:latin typeface="Arial" panose="020B0604020202020204" pitchFamily="34" charset="0"/>
               </a:rPr>
-              <a:t>CSS</a:t>
-            </a:r>
-            <a:endParaRPr kumimoji="1" lang="ja-JP" altLang="en-US" sz="2000">
-              <a:solidFill>
-                <a:srgbClr val="333333"/>
-              </a:solidFill>
-              <a:latin typeface="Arial" panose="020B0604020202020204" pitchFamily="34" charset="0"/>
-            </a:endParaRPr>
+              <a:t>CSS
+</a:t>
+            </a:r>
+            <a:r>
+              <a:rPr kumimoji="1" lang="ja-JP" altLang="en-US" sz="2000">
+                <a:solidFill>
+                  <a:srgbClr val="333333"/>
+                </a:solidFill>
+                <a:latin typeface="Arial" panose="020B0604020202020204" pitchFamily="34" charset="0"/>
+              </a:rPr>
+              <a:t>役割を分け、保守しやすい構成を目指しています。</a:t>
+            </a:r>
           </a:p>
         </p:txBody>
       </p:sp>
@@ -4481,7 +4479,7 @@
           <p:cNvPr id="5" name="テキスト ボックス 4">
             <a:extLst>
               <a:ext uri="{FF2B5EF4-FFF2-40B4-BE49-F238E27FC236}">
-                <a16:creationId xmlns:a16="http://schemas.microsoft.com/office/drawing/2014/main" id="{BBAE9588-F23C-4DF4-B272-9A20D27FF79C}"/>
+                <a16:creationId xmlns:a16="http://schemas.microsoft.com/office/drawing/2014/main" id="{CB1406FD-CCBE-774A-0A48-79E421BBFB0A}"/>
               </a:ext>
             </a:extLst>
           </p:cNvPr>
@@ -4528,7 +4526,7 @@
             <a:hlinkClick r:id="" action="ppaction://media"/>
             <a:extLst>
               <a:ext uri="{FF2B5EF4-FFF2-40B4-BE49-F238E27FC236}">
-                <a16:creationId xmlns:a16="http://schemas.microsoft.com/office/drawing/2014/main" id="{4DEEB957-661E-2BA4-B373-A37B81B81985}"/>
+                <a16:creationId xmlns:a16="http://schemas.microsoft.com/office/drawing/2014/main" id="{9F85F153-7536-FD4E-0C2F-1E4B15212D14}"/>
               </a:ext>
             </a:extLst>
           </p:cNvPr>
@@ -4563,7 +4561,7 @@
     </p:spTree>
     <p:extLst>
       <p:ext uri="{BB962C8B-B14F-4D97-AF65-F5344CB8AC3E}">
-        <p14:creationId xmlns:p14="http://schemas.microsoft.com/office/powerpoint/2010/main" val="4006125489"/>
+        <p14:creationId xmlns:p14="http://schemas.microsoft.com/office/powerpoint/2010/main" val="2041887442"/>
       </p:ext>
     </p:extLst>
   </p:cSld>
@@ -4687,7 +4685,7 @@
           <p:cNvPr id="2" name="テキスト ボックス 1">
             <a:extLst>
               <a:ext uri="{FF2B5EF4-FFF2-40B4-BE49-F238E27FC236}">
-                <a16:creationId xmlns:a16="http://schemas.microsoft.com/office/drawing/2014/main" id="{E8CDC978-FEC3-E589-07B6-697DE3A1FF97}"/>
+                <a16:creationId xmlns:a16="http://schemas.microsoft.com/office/drawing/2014/main" id="{3964212A-18C0-E674-BAD5-97B611B25249}"/>
               </a:ext>
             </a:extLst>
           </p:cNvPr>
@@ -4733,7 +4731,7 @@
           <p:cNvPr id="3" name="テキスト ボックス 2">
             <a:extLst>
               <a:ext uri="{FF2B5EF4-FFF2-40B4-BE49-F238E27FC236}">
-                <a16:creationId xmlns:a16="http://schemas.microsoft.com/office/drawing/2014/main" id="{701259E5-AE00-DF4D-CA90-4ACD57DE2A4D}"/>
+                <a16:creationId xmlns:a16="http://schemas.microsoft.com/office/drawing/2014/main" id="{76169393-4E18-F48F-CD9A-88DF0D84B14A}"/>
               </a:ext>
             </a:extLst>
           </p:cNvPr>
@@ -4757,20 +4755,14 @@
           <a:lstStyle/>
           <a:p>
             <a:r>
-              <a:rPr kumimoji="1" lang="en-US" altLang="ja-JP" sz="3400" b="1">
+              <a:rPr kumimoji="1" lang="ja-JP" altLang="en-US" sz="3400" b="1">
                 <a:solidFill>
                   <a:srgbClr val="111111"/>
                 </a:solidFill>
                 <a:latin typeface="Arial" panose="020B0604020202020204" pitchFamily="34" charset="0"/>
               </a:rPr>
-              <a:t>REPOSITORY HIGHLIGHTS</a:t>
-            </a:r>
-            <a:endParaRPr kumimoji="1" lang="ja-JP" altLang="en-US" sz="3400" b="1">
-              <a:solidFill>
-                <a:srgbClr val="111111"/>
-              </a:solidFill>
-              <a:latin typeface="Arial" panose="020B0604020202020204" pitchFamily="34" charset="0"/>
-            </a:endParaRPr>
+              <a:t>リポジトリの読みどころ</a:t>
+            </a:r>
           </a:p>
         </p:txBody>
       </p:sp>
@@ -4779,7 +4771,7 @@
           <p:cNvPr id="4" name="テキスト ボックス 3">
             <a:extLst>
               <a:ext uri="{FF2B5EF4-FFF2-40B4-BE49-F238E27FC236}">
-                <a16:creationId xmlns:a16="http://schemas.microsoft.com/office/drawing/2014/main" id="{C3101FCE-3A87-FB92-5580-4D28DFB8D585}"/>
+                <a16:creationId xmlns:a16="http://schemas.microsoft.com/office/drawing/2014/main" id="{5255CDFC-C29A-CB6D-FFF9-19E960C2627F}"/>
               </a:ext>
             </a:extLst>
           </p:cNvPr>
@@ -4789,7 +4781,7 @@
         <p:spPr>
           <a:xfrm>
             <a:off x="533400" y="3429000"/>
-            <a:ext cx="10795000" cy="400110"/>
+            <a:ext cx="10795000" cy="707886"/>
           </a:xfrm>
           <a:prstGeom prst="rect">
             <a:avLst/>
@@ -4803,13 +4795,77 @@
           <a:lstStyle/>
           <a:p>
             <a:r>
+              <a:rPr kumimoji="1" lang="ja-JP" altLang="en-US" sz="2000">
+                <a:solidFill>
+                  <a:srgbClr val="333333"/>
+                </a:solidFill>
+                <a:latin typeface="Arial" panose="020B0604020202020204" pitchFamily="34" charset="0"/>
+              </a:rPr>
+              <a:t>公開コード、</a:t>
+            </a:r>
+            <a:r>
               <a:rPr kumimoji="1" lang="en-US" altLang="ja-JP" sz="2000">
                 <a:solidFill>
                   <a:srgbClr val="333333"/>
                 </a:solidFill>
                 <a:latin typeface="Arial" panose="020B0604020202020204" pitchFamily="34" charset="0"/>
               </a:rPr>
-              <a:t>Public source code, README and commit history reveal the design decisions.</a:t>
+              <a:t>README</a:t>
+            </a:r>
+            <a:r>
+              <a:rPr kumimoji="1" lang="ja-JP" altLang="en-US" sz="2000">
+                <a:solidFill>
+                  <a:srgbClr val="333333"/>
+                </a:solidFill>
+                <a:latin typeface="Arial" panose="020B0604020202020204" pitchFamily="34" charset="0"/>
+              </a:rPr>
+              <a:t>、コミット履歴から設計判断を確認できます。
+主なファイル：</a:t>
+            </a:r>
+            <a:r>
+              <a:rPr kumimoji="1" lang="en-US" altLang="ja-JP" sz="2000">
+                <a:solidFill>
+                  <a:srgbClr val="333333"/>
+                </a:solidFill>
+                <a:latin typeface="Arial" panose="020B0604020202020204" pitchFamily="34" charset="0"/>
+              </a:rPr>
+              <a:t>AGENTS.md</a:t>
+            </a:r>
+            <a:r>
+              <a:rPr kumimoji="1" lang="ja-JP" altLang="en-US" sz="2000">
+                <a:solidFill>
+                  <a:srgbClr val="333333"/>
+                </a:solidFill>
+                <a:latin typeface="Arial" panose="020B0604020202020204" pitchFamily="34" charset="0"/>
+              </a:rPr>
+              <a:t>、</a:t>
+            </a:r>
+            <a:r>
+              <a:rPr kumimoji="1" lang="en-US" altLang="ja-JP" sz="2000">
+                <a:solidFill>
+                  <a:srgbClr val="333333"/>
+                </a:solidFill>
+                <a:latin typeface="Arial" panose="020B0604020202020204" pitchFamily="34" charset="0"/>
+              </a:rPr>
+              <a:t>CLAUDE.md</a:t>
+            </a:r>
+            <a:r>
+              <a:rPr kumimoji="1" lang="ja-JP" altLang="en-US" sz="2000">
+                <a:solidFill>
+                  <a:srgbClr val="333333"/>
+                </a:solidFill>
+                <a:latin typeface="Arial" panose="020B0604020202020204" pitchFamily="34" charset="0"/>
+              </a:rPr>
+              <a:t>、</a:t>
+            </a:r>
+            <a:r>
+              <a:rPr kumimoji="1" lang="en-US" altLang="ja-JP" sz="2000">
+                <a:solidFill>
+                  <a:srgbClr val="333333"/>
+                </a:solidFill>
+                <a:latin typeface="Arial" panose="020B0604020202020204" pitchFamily="34" charset="0"/>
+              </a:rPr>
+              <a:t>README.md</a:t>
             </a:r>
             <a:endParaRPr kumimoji="1" lang="ja-JP" altLang="en-US" sz="2000">
               <a:solidFill>
@@ -4825,7 +4881,7 @@
           <p:cNvPr id="5" name="テキスト ボックス 4">
             <a:extLst>
               <a:ext uri="{FF2B5EF4-FFF2-40B4-BE49-F238E27FC236}">
-                <a16:creationId xmlns:a16="http://schemas.microsoft.com/office/drawing/2014/main" id="{12407DED-C555-AEA4-CE6A-D765B4D2AE72}"/>
+                <a16:creationId xmlns:a16="http://schemas.microsoft.com/office/drawing/2014/main" id="{CFCB3D99-9FD7-CA1A-EFEF-666F5499AC88}"/>
               </a:ext>
             </a:extLst>
           </p:cNvPr>
@@ -4872,7 +4928,7 @@
             <a:hlinkClick r:id="" action="ppaction://media"/>
             <a:extLst>
               <a:ext uri="{FF2B5EF4-FFF2-40B4-BE49-F238E27FC236}">
-                <a16:creationId xmlns:a16="http://schemas.microsoft.com/office/drawing/2014/main" id="{C3E0751E-BF87-63AF-93C9-3C57D7D92359}"/>
+                <a16:creationId xmlns:a16="http://schemas.microsoft.com/office/drawing/2014/main" id="{A116A4D7-3DF2-C0CD-F218-85069897CD06}"/>
               </a:ext>
             </a:extLst>
           </p:cNvPr>
@@ -4907,7 +4963,7 @@
     </p:spTree>
     <p:extLst>
       <p:ext uri="{BB962C8B-B14F-4D97-AF65-F5344CB8AC3E}">
-        <p14:creationId xmlns:p14="http://schemas.microsoft.com/office/powerpoint/2010/main" val="2874619426"/>
+        <p14:creationId xmlns:p14="http://schemas.microsoft.com/office/powerpoint/2010/main" val="2659567758"/>
       </p:ext>
     </p:extLst>
   </p:cSld>
@@ -5031,7 +5087,7 @@
           <p:cNvPr id="2" name="テキスト ボックス 1">
             <a:extLst>
               <a:ext uri="{FF2B5EF4-FFF2-40B4-BE49-F238E27FC236}">
-                <a16:creationId xmlns:a16="http://schemas.microsoft.com/office/drawing/2014/main" id="{3B46B126-DA54-F1B7-BCF8-B5EC54B3FC86}"/>
+                <a16:creationId xmlns:a16="http://schemas.microsoft.com/office/drawing/2014/main" id="{74AEEBD5-39F2-D4DD-DFBF-563A238027CB}"/>
               </a:ext>
             </a:extLst>
           </p:cNvPr>
@@ -5077,7 +5133,7 @@
           <p:cNvPr id="3" name="テキスト ボックス 2">
             <a:extLst>
               <a:ext uri="{FF2B5EF4-FFF2-40B4-BE49-F238E27FC236}">
-                <a16:creationId xmlns:a16="http://schemas.microsoft.com/office/drawing/2014/main" id="{4E0918FB-C83F-9BA2-0450-48C92AD16376}"/>
+                <a16:creationId xmlns:a16="http://schemas.microsoft.com/office/drawing/2014/main" id="{FF96F8D8-A4A0-1B0F-3D11-D31C66B961E2}"/>
               </a:ext>
             </a:extLst>
           </p:cNvPr>
@@ -5101,20 +5157,14 @@
           <a:lstStyle/>
           <a:p>
             <a:r>
-              <a:rPr kumimoji="1" lang="en-US" altLang="ja-JP" sz="3400" b="1">
+              <a:rPr kumimoji="1" lang="ja-JP" altLang="en-US" sz="3400" b="1">
                 <a:solidFill>
                   <a:srgbClr val="111111"/>
                 </a:solidFill>
                 <a:latin typeface="Arial" panose="020B0604020202020204" pitchFamily="34" charset="0"/>
               </a:rPr>
-              <a:t>ITERATIVE IMPROVEMENT</a:t>
-            </a:r>
-            <a:endParaRPr kumimoji="1" lang="ja-JP" altLang="en-US" sz="3400" b="1">
-              <a:solidFill>
-                <a:srgbClr val="111111"/>
-              </a:solidFill>
-              <a:latin typeface="Arial" panose="020B0604020202020204" pitchFamily="34" charset="0"/>
-            </a:endParaRPr>
+              <a:t>コミットから分かる改善</a:t>
+            </a:r>
           </a:p>
         </p:txBody>
       </p:sp>
@@ -5123,7 +5173,7 @@
           <p:cNvPr id="4" name="テキスト ボックス 3">
             <a:extLst>
               <a:ext uri="{FF2B5EF4-FFF2-40B4-BE49-F238E27FC236}">
-                <a16:creationId xmlns:a16="http://schemas.microsoft.com/office/drawing/2014/main" id="{168C6975-837F-1DEA-1A2B-8B4693555752}"/>
+                <a16:creationId xmlns:a16="http://schemas.microsoft.com/office/drawing/2014/main" id="{286E9012-43E3-DA20-1BE0-2D64C919CAC9}"/>
               </a:ext>
             </a:extLst>
           </p:cNvPr>
@@ -5153,7 +5203,7 @@
                 </a:solidFill>
                 <a:latin typeface="Arial" panose="020B0604020202020204" pitchFamily="34" charset="0"/>
               </a:rPr>
-              <a:t>Small commits continuously improve features, quality and release readiness.</a:t>
+              <a:t>Add host-based landing page variants for multi-domain rollout</a:t>
             </a:r>
             <a:endParaRPr kumimoji="1" lang="ja-JP" altLang="en-US" sz="2000">
               <a:solidFill>
@@ -5169,7 +5219,7 @@
           <p:cNvPr id="5" name="テキスト ボックス 4">
             <a:extLst>
               <a:ext uri="{FF2B5EF4-FFF2-40B4-BE49-F238E27FC236}">
-                <a16:creationId xmlns:a16="http://schemas.microsoft.com/office/drawing/2014/main" id="{90ED42FD-3B1A-AA8F-5D39-A63A6643D85D}"/>
+                <a16:creationId xmlns:a16="http://schemas.microsoft.com/office/drawing/2014/main" id="{17A983F6-D455-D3D2-EF6C-15067D83B9B3}"/>
               </a:ext>
             </a:extLst>
           </p:cNvPr>
@@ -5216,7 +5266,7 @@
             <a:hlinkClick r:id="" action="ppaction://media"/>
             <a:extLst>
               <a:ext uri="{FF2B5EF4-FFF2-40B4-BE49-F238E27FC236}">
-                <a16:creationId xmlns:a16="http://schemas.microsoft.com/office/drawing/2014/main" id="{F142204B-FC2A-0351-97C8-DAF837F2119C}"/>
+                <a16:creationId xmlns:a16="http://schemas.microsoft.com/office/drawing/2014/main" id="{6C05C0D2-DA2B-FF71-A2D0-68095B8A7988}"/>
               </a:ext>
             </a:extLst>
           </p:cNvPr>
@@ -5251,7 +5301,7 @@
     </p:spTree>
     <p:extLst>
       <p:ext uri="{BB962C8B-B14F-4D97-AF65-F5344CB8AC3E}">
-        <p14:creationId xmlns:p14="http://schemas.microsoft.com/office/powerpoint/2010/main" val="1006797091"/>
+        <p14:creationId xmlns:p14="http://schemas.microsoft.com/office/powerpoint/2010/main" val="2774773026"/>
       </p:ext>
     </p:extLst>
   </p:cSld>
@@ -5375,7 +5425,7 @@
           <p:cNvPr id="2" name="テキスト ボックス 1">
             <a:extLst>
               <a:ext uri="{FF2B5EF4-FFF2-40B4-BE49-F238E27FC236}">
-                <a16:creationId xmlns:a16="http://schemas.microsoft.com/office/drawing/2014/main" id="{4DE395AE-F645-CBFA-5077-537DB719ABEF}"/>
+                <a16:creationId xmlns:a16="http://schemas.microsoft.com/office/drawing/2014/main" id="{233C94CD-6719-EF4E-AC46-15DFAD7BC6B8}"/>
               </a:ext>
             </a:extLst>
           </p:cNvPr>
@@ -5421,7 +5471,7 @@
           <p:cNvPr id="3" name="テキスト ボックス 2">
             <a:extLst>
               <a:ext uri="{FF2B5EF4-FFF2-40B4-BE49-F238E27FC236}">
-                <a16:creationId xmlns:a16="http://schemas.microsoft.com/office/drawing/2014/main" id="{2F0AD0AC-9536-F3B0-8D64-CE3F42B4D9B7}"/>
+                <a16:creationId xmlns:a16="http://schemas.microsoft.com/office/drawing/2014/main" id="{0F2E60C4-1079-01A8-492D-6AD88189464C}"/>
               </a:ext>
             </a:extLst>
           </p:cNvPr>
@@ -5445,20 +5495,14 @@
           <a:lstStyle/>
           <a:p>
             <a:r>
-              <a:rPr kumimoji="1" lang="en-US" altLang="ja-JP" sz="3400" b="1">
+              <a:rPr kumimoji="1" lang="ja-JP" altLang="en-US" sz="3400" b="1">
                 <a:solidFill>
                   <a:srgbClr val="111111"/>
                 </a:solidFill>
                 <a:latin typeface="Arial" panose="020B0604020202020204" pitchFamily="34" charset="0"/>
               </a:rPr>
-              <a:t>READ THE FULL ARTICLE</a:t>
-            </a:r>
-            <a:endParaRPr kumimoji="1" lang="ja-JP" altLang="en-US" sz="3400" b="1">
-              <a:solidFill>
-                <a:srgbClr val="111111"/>
-              </a:solidFill>
-              <a:latin typeface="Arial" panose="020B0604020202020204" pitchFamily="34" charset="0"/>
-            </a:endParaRPr>
+              <a:t>詳しくは積み上げログへ</a:t>
+            </a:r>
           </a:p>
         </p:txBody>
       </p:sp>
@@ -5467,7 +5511,7 @@
           <p:cNvPr id="4" name="テキスト ボックス 3">
             <a:extLst>
               <a:ext uri="{FF2B5EF4-FFF2-40B4-BE49-F238E27FC236}">
-                <a16:creationId xmlns:a16="http://schemas.microsoft.com/office/drawing/2014/main" id="{25B9D2B8-C6CB-2595-5990-F40D916E1D36}"/>
+                <a16:creationId xmlns:a16="http://schemas.microsoft.com/office/drawing/2014/main" id="{CC526CF4-12E3-DD5A-A1CD-1BA4A341578E}"/>
               </a:ext>
             </a:extLst>
           </p:cNvPr>
@@ -5491,14 +5535,32 @@
           <a:lstStyle/>
           <a:p>
             <a:r>
-              <a:rPr kumimoji="1" lang="sv-SE" altLang="ja-JP" sz="2000">
+              <a:rPr kumimoji="1" lang="zh-TW" altLang="en-US" sz="2000">
+                <a:solidFill>
+                  <a:srgbClr val="333333"/>
+                </a:solidFill>
+                <a:latin typeface="Arial" panose="020B0604020202020204" pitchFamily="34" charset="0"/>
+              </a:rPr>
+              <a:t>記事： </a:t>
+            </a:r>
+            <a:r>
+              <a:rPr kumimoji="1" lang="en-US" altLang="zh-TW" sz="2000">
                 <a:solidFill>
                   <a:srgbClr val="333333"/>
                 </a:solidFill>
                 <a:latin typeface="Arial" panose="020B0604020202020204" pitchFamily="34" charset="0"/>
               </a:rPr>
               <a:t>https://syunnjack.dev/articles/reserve-serapi
-TSUMIAGE LOG</a:t>
+</a:t>
+            </a:r>
+            <a:r>
+              <a:rPr kumimoji="1" lang="zh-TW" altLang="en-US" sz="2000">
+                <a:solidFill>
+                  <a:srgbClr val="333333"/>
+                </a:solidFill>
+                <a:latin typeface="Arial" panose="020B0604020202020204" pitchFamily="34" charset="0"/>
+              </a:rPr>
+              <a:t>学び、作り、振り返る開発記録。</a:t>
             </a:r>
             <a:endParaRPr kumimoji="1" lang="ja-JP" altLang="en-US" sz="2000">
               <a:solidFill>
@@ -5514,7 +5576,7 @@
           <p:cNvPr id="5" name="テキスト ボックス 4">
             <a:extLst>
               <a:ext uri="{FF2B5EF4-FFF2-40B4-BE49-F238E27FC236}">
-                <a16:creationId xmlns:a16="http://schemas.microsoft.com/office/drawing/2014/main" id="{2463C614-81B9-1A5A-2FD3-4B0BFEBCC62B}"/>
+                <a16:creationId xmlns:a16="http://schemas.microsoft.com/office/drawing/2014/main" id="{A427D649-0AC8-6317-6B02-89568C90485F}"/>
               </a:ext>
             </a:extLst>
           </p:cNvPr>
@@ -5561,7 +5623,7 @@
             <a:hlinkClick r:id="" action="ppaction://media"/>
             <a:extLst>
               <a:ext uri="{FF2B5EF4-FFF2-40B4-BE49-F238E27FC236}">
-                <a16:creationId xmlns:a16="http://schemas.microsoft.com/office/drawing/2014/main" id="{7E194C8A-1A69-2CB9-78BA-201739956DEC}"/>
+                <a16:creationId xmlns:a16="http://schemas.microsoft.com/office/drawing/2014/main" id="{BF4E52FA-BB2D-C1BF-AC2C-52A95C23030E}"/>
               </a:ext>
             </a:extLst>
           </p:cNvPr>
@@ -5596,7 +5658,7 @@
     </p:spTree>
     <p:extLst>
       <p:ext uri="{BB962C8B-B14F-4D97-AF65-F5344CB8AC3E}">
-        <p14:creationId xmlns:p14="http://schemas.microsoft.com/office/powerpoint/2010/main" val="3201038023"/>
+        <p14:creationId xmlns:p14="http://schemas.microsoft.com/office/powerpoint/2010/main" val="4195277843"/>
       </p:ext>
     </p:extLst>
   </p:cSld>

--- a/public/videos/repositories/reserve-serapi/reserve-serapi-tech-preview.pptx
+++ b/public/videos/repositories/reserve-serapi/reserve-serapi-tech-preview.pptx
@@ -134,7 +134,7 @@
           <p:cNvPr id="2" name="タイトル 1">
             <a:extLst>
               <a:ext uri="{FF2B5EF4-FFF2-40B4-BE49-F238E27FC236}">
-                <a16:creationId xmlns:a16="http://schemas.microsoft.com/office/drawing/2014/main" id="{E08C5571-6863-D9CF-E701-9F1C2B166C8E}"/>
+                <a16:creationId xmlns:a16="http://schemas.microsoft.com/office/drawing/2014/main" id="{97B2A46F-3655-DF5D-BA26-3D2E557B84DE}"/>
               </a:ext>
             </a:extLst>
           </p:cNvPr>
@@ -171,7 +171,7 @@
           <p:cNvPr id="3" name="字幕 2">
             <a:extLst>
               <a:ext uri="{FF2B5EF4-FFF2-40B4-BE49-F238E27FC236}">
-                <a16:creationId xmlns:a16="http://schemas.microsoft.com/office/drawing/2014/main" id="{188BBEFF-AD2F-9319-235E-12405D8FD981}"/>
+                <a16:creationId xmlns:a16="http://schemas.microsoft.com/office/drawing/2014/main" id="{D82A6688-74B5-F7BF-F277-93C57D2F3BB7}"/>
               </a:ext>
             </a:extLst>
           </p:cNvPr>
@@ -241,7 +241,7 @@
           <p:cNvPr id="4" name="日付プレースホルダー 3">
             <a:extLst>
               <a:ext uri="{FF2B5EF4-FFF2-40B4-BE49-F238E27FC236}">
-                <a16:creationId xmlns:a16="http://schemas.microsoft.com/office/drawing/2014/main" id="{36C8387A-F93A-38ED-2DFD-6BEF6F41F484}"/>
+                <a16:creationId xmlns:a16="http://schemas.microsoft.com/office/drawing/2014/main" id="{43DDCA94-34D5-33C7-DD84-2E2BCA17BA86}"/>
               </a:ext>
             </a:extLst>
           </p:cNvPr>
@@ -257,7 +257,7 @@
           <a:bodyPr/>
           <a:lstStyle/>
           <a:p>
-            <a:fld id="{7C5932AC-8A4A-4D44-A795-EB17C097D024}" type="datetimeFigureOut">
+            <a:fld id="{F0C067B3-486C-43B8-8CB8-F25D5694A965}" type="datetimeFigureOut">
               <a:rPr kumimoji="1" lang="ja-JP" altLang="en-US" smtClean="0"/>
               <a:t>2026/7/30</a:t>
             </a:fld>
@@ -270,7 +270,7 @@
           <p:cNvPr id="5" name="フッター プレースホルダー 4">
             <a:extLst>
               <a:ext uri="{FF2B5EF4-FFF2-40B4-BE49-F238E27FC236}">
-                <a16:creationId xmlns:a16="http://schemas.microsoft.com/office/drawing/2014/main" id="{E19CA706-BB46-B473-3C9C-993947BA5ED4}"/>
+                <a16:creationId xmlns:a16="http://schemas.microsoft.com/office/drawing/2014/main" id="{07C6EC8E-475D-A2B5-7EE2-56B457266999}"/>
               </a:ext>
             </a:extLst>
           </p:cNvPr>
@@ -295,7 +295,7 @@
           <p:cNvPr id="6" name="スライド番号プレースホルダー 5">
             <a:extLst>
               <a:ext uri="{FF2B5EF4-FFF2-40B4-BE49-F238E27FC236}">
-                <a16:creationId xmlns:a16="http://schemas.microsoft.com/office/drawing/2014/main" id="{1D2B1295-CBDA-50D3-A6F2-4D055BEBE8E9}"/>
+                <a16:creationId xmlns:a16="http://schemas.microsoft.com/office/drawing/2014/main" id="{29AA9CCD-423E-E7DA-E4AA-54F163559D32}"/>
               </a:ext>
             </a:extLst>
           </p:cNvPr>
@@ -311,7 +311,7 @@
           <a:bodyPr/>
           <a:lstStyle/>
           <a:p>
-            <a:fld id="{79E68B47-8499-4127-ADBF-8D3F68AAD936}" type="slidenum">
+            <a:fld id="{C1C2DDE5-B11C-419E-B46A-CBCC68887370}" type="slidenum">
               <a:rPr kumimoji="1" lang="ja-JP" altLang="en-US" smtClean="0"/>
               <a:t>‹#›</a:t>
             </a:fld>
@@ -322,7 +322,7 @@
     </p:spTree>
     <p:extLst>
       <p:ext uri="{BB962C8B-B14F-4D97-AF65-F5344CB8AC3E}">
-        <p14:creationId xmlns:p14="http://schemas.microsoft.com/office/powerpoint/2010/main" val="2094395359"/>
+        <p14:creationId xmlns:p14="http://schemas.microsoft.com/office/powerpoint/2010/main" val="1561145713"/>
       </p:ext>
     </p:extLst>
   </p:cSld>
@@ -354,7 +354,7 @@
           <p:cNvPr id="2" name="タイトル 1">
             <a:extLst>
               <a:ext uri="{FF2B5EF4-FFF2-40B4-BE49-F238E27FC236}">
-                <a16:creationId xmlns:a16="http://schemas.microsoft.com/office/drawing/2014/main" id="{2016B64B-8B31-1B34-519C-3301BBD61394}"/>
+                <a16:creationId xmlns:a16="http://schemas.microsoft.com/office/drawing/2014/main" id="{714014D9-00EA-8683-B0A4-571F50E44FCF}"/>
               </a:ext>
             </a:extLst>
           </p:cNvPr>
@@ -382,7 +382,7 @@
           <p:cNvPr id="3" name="縦書きテキスト プレースホルダー 2">
             <a:extLst>
               <a:ext uri="{FF2B5EF4-FFF2-40B4-BE49-F238E27FC236}">
-                <a16:creationId xmlns:a16="http://schemas.microsoft.com/office/drawing/2014/main" id="{6DA32D8C-0ED9-57EC-AD15-9194DCCCEC4B}"/>
+                <a16:creationId xmlns:a16="http://schemas.microsoft.com/office/drawing/2014/main" id="{EFCC78E3-A069-9983-3099-2CBCF21987C5}"/>
               </a:ext>
             </a:extLst>
           </p:cNvPr>
@@ -471,7 +471,7 @@
           <p:cNvPr id="4" name="日付プレースホルダー 3">
             <a:extLst>
               <a:ext uri="{FF2B5EF4-FFF2-40B4-BE49-F238E27FC236}">
-                <a16:creationId xmlns:a16="http://schemas.microsoft.com/office/drawing/2014/main" id="{F571E120-A55E-76C4-F596-3CB9D8DEE29A}"/>
+                <a16:creationId xmlns:a16="http://schemas.microsoft.com/office/drawing/2014/main" id="{05AC764E-90A4-DE71-8225-730D329BFED5}"/>
               </a:ext>
             </a:extLst>
           </p:cNvPr>
@@ -487,7 +487,7 @@
           <a:bodyPr/>
           <a:lstStyle/>
           <a:p>
-            <a:fld id="{7C5932AC-8A4A-4D44-A795-EB17C097D024}" type="datetimeFigureOut">
+            <a:fld id="{F0C067B3-486C-43B8-8CB8-F25D5694A965}" type="datetimeFigureOut">
               <a:rPr kumimoji="1" lang="ja-JP" altLang="en-US" smtClean="0"/>
               <a:t>2026/7/30</a:t>
             </a:fld>
@@ -500,7 +500,7 @@
           <p:cNvPr id="5" name="フッター プレースホルダー 4">
             <a:extLst>
               <a:ext uri="{FF2B5EF4-FFF2-40B4-BE49-F238E27FC236}">
-                <a16:creationId xmlns:a16="http://schemas.microsoft.com/office/drawing/2014/main" id="{058E6A7F-50AD-B4B0-832C-D545294707D2}"/>
+                <a16:creationId xmlns:a16="http://schemas.microsoft.com/office/drawing/2014/main" id="{47A058CA-0FA2-BE74-2CCF-319EEE24586D}"/>
               </a:ext>
             </a:extLst>
           </p:cNvPr>
@@ -525,7 +525,7 @@
           <p:cNvPr id="6" name="スライド番号プレースホルダー 5">
             <a:extLst>
               <a:ext uri="{FF2B5EF4-FFF2-40B4-BE49-F238E27FC236}">
-                <a16:creationId xmlns:a16="http://schemas.microsoft.com/office/drawing/2014/main" id="{87239920-A4CB-24CC-F10F-E8FA21EA4444}"/>
+                <a16:creationId xmlns:a16="http://schemas.microsoft.com/office/drawing/2014/main" id="{5467F97E-C8FC-4819-FAC3-05358A515A64}"/>
               </a:ext>
             </a:extLst>
           </p:cNvPr>
@@ -541,7 +541,7 @@
           <a:bodyPr/>
           <a:lstStyle/>
           <a:p>
-            <a:fld id="{79E68B47-8499-4127-ADBF-8D3F68AAD936}" type="slidenum">
+            <a:fld id="{C1C2DDE5-B11C-419E-B46A-CBCC68887370}" type="slidenum">
               <a:rPr kumimoji="1" lang="ja-JP" altLang="en-US" smtClean="0"/>
               <a:t>‹#›</a:t>
             </a:fld>
@@ -552,7 +552,7 @@
     </p:spTree>
     <p:extLst>
       <p:ext uri="{BB962C8B-B14F-4D97-AF65-F5344CB8AC3E}">
-        <p14:creationId xmlns:p14="http://schemas.microsoft.com/office/powerpoint/2010/main" val="2139750314"/>
+        <p14:creationId xmlns:p14="http://schemas.microsoft.com/office/powerpoint/2010/main" val="2478596795"/>
       </p:ext>
     </p:extLst>
   </p:cSld>
@@ -584,7 +584,7 @@
           <p:cNvPr id="2" name="縦書きタイトル 1">
             <a:extLst>
               <a:ext uri="{FF2B5EF4-FFF2-40B4-BE49-F238E27FC236}">
-                <a16:creationId xmlns:a16="http://schemas.microsoft.com/office/drawing/2014/main" id="{0600A295-550E-F92C-7B99-B04DDB12CBA2}"/>
+                <a16:creationId xmlns:a16="http://schemas.microsoft.com/office/drawing/2014/main" id="{13F6ACE1-A139-206C-45C5-169704410C9E}"/>
               </a:ext>
             </a:extLst>
           </p:cNvPr>
@@ -617,7 +617,7 @@
           <p:cNvPr id="3" name="縦書きテキスト プレースホルダー 2">
             <a:extLst>
               <a:ext uri="{FF2B5EF4-FFF2-40B4-BE49-F238E27FC236}">
-                <a16:creationId xmlns:a16="http://schemas.microsoft.com/office/drawing/2014/main" id="{27368211-D85B-DD0D-ADE5-B84E4397F259}"/>
+                <a16:creationId xmlns:a16="http://schemas.microsoft.com/office/drawing/2014/main" id="{E26A59DE-CD6F-2E2B-5D68-1870A804B6C4}"/>
               </a:ext>
             </a:extLst>
           </p:cNvPr>
@@ -711,7 +711,7 @@
           <p:cNvPr id="4" name="日付プレースホルダー 3">
             <a:extLst>
               <a:ext uri="{FF2B5EF4-FFF2-40B4-BE49-F238E27FC236}">
-                <a16:creationId xmlns:a16="http://schemas.microsoft.com/office/drawing/2014/main" id="{992002D6-DE1D-152C-BE9B-41D105068E39}"/>
+                <a16:creationId xmlns:a16="http://schemas.microsoft.com/office/drawing/2014/main" id="{4573CD30-2146-605B-5BEE-9AA5B837B2D3}"/>
               </a:ext>
             </a:extLst>
           </p:cNvPr>
@@ -727,7 +727,7 @@
           <a:bodyPr/>
           <a:lstStyle/>
           <a:p>
-            <a:fld id="{7C5932AC-8A4A-4D44-A795-EB17C097D024}" type="datetimeFigureOut">
+            <a:fld id="{F0C067B3-486C-43B8-8CB8-F25D5694A965}" type="datetimeFigureOut">
               <a:rPr kumimoji="1" lang="ja-JP" altLang="en-US" smtClean="0"/>
               <a:t>2026/7/30</a:t>
             </a:fld>
@@ -740,7 +740,7 @@
           <p:cNvPr id="5" name="フッター プレースホルダー 4">
             <a:extLst>
               <a:ext uri="{FF2B5EF4-FFF2-40B4-BE49-F238E27FC236}">
-                <a16:creationId xmlns:a16="http://schemas.microsoft.com/office/drawing/2014/main" id="{0CD28BFA-783C-6141-F356-49744B637274}"/>
+                <a16:creationId xmlns:a16="http://schemas.microsoft.com/office/drawing/2014/main" id="{A9558F46-3AA4-BE10-76F7-A4D99A9BD680}"/>
               </a:ext>
             </a:extLst>
           </p:cNvPr>
@@ -765,7 +765,7 @@
           <p:cNvPr id="6" name="スライド番号プレースホルダー 5">
             <a:extLst>
               <a:ext uri="{FF2B5EF4-FFF2-40B4-BE49-F238E27FC236}">
-                <a16:creationId xmlns:a16="http://schemas.microsoft.com/office/drawing/2014/main" id="{7AC42D75-E54D-E0E1-9DF1-BAF3CEFCAD0E}"/>
+                <a16:creationId xmlns:a16="http://schemas.microsoft.com/office/drawing/2014/main" id="{308D1913-A2F6-789C-2D02-543683DDA75C}"/>
               </a:ext>
             </a:extLst>
           </p:cNvPr>
@@ -781,7 +781,7 @@
           <a:bodyPr/>
           <a:lstStyle/>
           <a:p>
-            <a:fld id="{79E68B47-8499-4127-ADBF-8D3F68AAD936}" type="slidenum">
+            <a:fld id="{C1C2DDE5-B11C-419E-B46A-CBCC68887370}" type="slidenum">
               <a:rPr kumimoji="1" lang="ja-JP" altLang="en-US" smtClean="0"/>
               <a:t>‹#›</a:t>
             </a:fld>
@@ -792,7 +792,7 @@
     </p:spTree>
     <p:extLst>
       <p:ext uri="{BB962C8B-B14F-4D97-AF65-F5344CB8AC3E}">
-        <p14:creationId xmlns:p14="http://schemas.microsoft.com/office/powerpoint/2010/main" val="1007213116"/>
+        <p14:creationId xmlns:p14="http://schemas.microsoft.com/office/powerpoint/2010/main" val="1661738724"/>
       </p:ext>
     </p:extLst>
   </p:cSld>
@@ -824,7 +824,7 @@
           <p:cNvPr id="2" name="タイトル 1">
             <a:extLst>
               <a:ext uri="{FF2B5EF4-FFF2-40B4-BE49-F238E27FC236}">
-                <a16:creationId xmlns:a16="http://schemas.microsoft.com/office/drawing/2014/main" id="{FDC6302C-E65C-A77A-A726-12F33D3B1A63}"/>
+                <a16:creationId xmlns:a16="http://schemas.microsoft.com/office/drawing/2014/main" id="{C03C3BB3-001D-A219-4B65-FE40B72AB9D1}"/>
               </a:ext>
             </a:extLst>
           </p:cNvPr>
@@ -852,7 +852,7 @@
           <p:cNvPr id="3" name="コンテンツ プレースホルダー 2">
             <a:extLst>
               <a:ext uri="{FF2B5EF4-FFF2-40B4-BE49-F238E27FC236}">
-                <a16:creationId xmlns:a16="http://schemas.microsoft.com/office/drawing/2014/main" id="{566558C1-A966-8267-FB0F-208C77E6592E}"/>
+                <a16:creationId xmlns:a16="http://schemas.microsoft.com/office/drawing/2014/main" id="{21DAA7CA-3943-905D-C681-8A24BBE30F67}"/>
               </a:ext>
             </a:extLst>
           </p:cNvPr>
@@ -941,7 +941,7 @@
           <p:cNvPr id="4" name="日付プレースホルダー 3">
             <a:extLst>
               <a:ext uri="{FF2B5EF4-FFF2-40B4-BE49-F238E27FC236}">
-                <a16:creationId xmlns:a16="http://schemas.microsoft.com/office/drawing/2014/main" id="{902037AD-9A71-7929-E016-EAF7BB939AAC}"/>
+                <a16:creationId xmlns:a16="http://schemas.microsoft.com/office/drawing/2014/main" id="{A2980935-BB09-D7A7-C6F2-0EE75D1CF8D1}"/>
               </a:ext>
             </a:extLst>
           </p:cNvPr>
@@ -957,7 +957,7 @@
           <a:bodyPr/>
           <a:lstStyle/>
           <a:p>
-            <a:fld id="{7C5932AC-8A4A-4D44-A795-EB17C097D024}" type="datetimeFigureOut">
+            <a:fld id="{F0C067B3-486C-43B8-8CB8-F25D5694A965}" type="datetimeFigureOut">
               <a:rPr kumimoji="1" lang="ja-JP" altLang="en-US" smtClean="0"/>
               <a:t>2026/7/30</a:t>
             </a:fld>
@@ -970,7 +970,7 @@
           <p:cNvPr id="5" name="フッター プレースホルダー 4">
             <a:extLst>
               <a:ext uri="{FF2B5EF4-FFF2-40B4-BE49-F238E27FC236}">
-                <a16:creationId xmlns:a16="http://schemas.microsoft.com/office/drawing/2014/main" id="{407160C7-2084-74BA-BD98-7AC9786AD62C}"/>
+                <a16:creationId xmlns:a16="http://schemas.microsoft.com/office/drawing/2014/main" id="{4700BE77-4308-8434-98BC-D9A279D63759}"/>
               </a:ext>
             </a:extLst>
           </p:cNvPr>
@@ -995,7 +995,7 @@
           <p:cNvPr id="6" name="スライド番号プレースホルダー 5">
             <a:extLst>
               <a:ext uri="{FF2B5EF4-FFF2-40B4-BE49-F238E27FC236}">
-                <a16:creationId xmlns:a16="http://schemas.microsoft.com/office/drawing/2014/main" id="{D770EC1A-D553-2444-F043-BC4A9FC28CD7}"/>
+                <a16:creationId xmlns:a16="http://schemas.microsoft.com/office/drawing/2014/main" id="{6A1411AE-2883-FB4D-F5DA-A2050F9E70C6}"/>
               </a:ext>
             </a:extLst>
           </p:cNvPr>
@@ -1011,7 +1011,7 @@
           <a:bodyPr/>
           <a:lstStyle/>
           <a:p>
-            <a:fld id="{79E68B47-8499-4127-ADBF-8D3F68AAD936}" type="slidenum">
+            <a:fld id="{C1C2DDE5-B11C-419E-B46A-CBCC68887370}" type="slidenum">
               <a:rPr kumimoji="1" lang="ja-JP" altLang="en-US" smtClean="0"/>
               <a:t>‹#›</a:t>
             </a:fld>
@@ -1022,7 +1022,7 @@
     </p:spTree>
     <p:extLst>
       <p:ext uri="{BB962C8B-B14F-4D97-AF65-F5344CB8AC3E}">
-        <p14:creationId xmlns:p14="http://schemas.microsoft.com/office/powerpoint/2010/main" val="544778849"/>
+        <p14:creationId xmlns:p14="http://schemas.microsoft.com/office/powerpoint/2010/main" val="957059414"/>
       </p:ext>
     </p:extLst>
   </p:cSld>
@@ -1054,7 +1054,7 @@
           <p:cNvPr id="2" name="タイトル 1">
             <a:extLst>
               <a:ext uri="{FF2B5EF4-FFF2-40B4-BE49-F238E27FC236}">
-                <a16:creationId xmlns:a16="http://schemas.microsoft.com/office/drawing/2014/main" id="{B31BA773-4E50-EA6B-0627-1971A3950751}"/>
+                <a16:creationId xmlns:a16="http://schemas.microsoft.com/office/drawing/2014/main" id="{C1537AC6-8066-974E-7580-080BADFD4268}"/>
               </a:ext>
             </a:extLst>
           </p:cNvPr>
@@ -1091,7 +1091,7 @@
           <p:cNvPr id="3" name="テキスト プレースホルダー 2">
             <a:extLst>
               <a:ext uri="{FF2B5EF4-FFF2-40B4-BE49-F238E27FC236}">
-                <a16:creationId xmlns:a16="http://schemas.microsoft.com/office/drawing/2014/main" id="{4D4C9473-65EB-8E46-ED0C-AC80B61BCE2C}"/>
+                <a16:creationId xmlns:a16="http://schemas.microsoft.com/office/drawing/2014/main" id="{FCF3D502-6E5E-E681-0933-DB1333CB3230}"/>
               </a:ext>
             </a:extLst>
           </p:cNvPr>
@@ -1216,7 +1216,7 @@
           <p:cNvPr id="4" name="日付プレースホルダー 3">
             <a:extLst>
               <a:ext uri="{FF2B5EF4-FFF2-40B4-BE49-F238E27FC236}">
-                <a16:creationId xmlns:a16="http://schemas.microsoft.com/office/drawing/2014/main" id="{74EE5D11-8011-6049-39F0-C8906EB7396B}"/>
+                <a16:creationId xmlns:a16="http://schemas.microsoft.com/office/drawing/2014/main" id="{6217C96A-BED8-F5AD-3FF5-1B05A0A0043F}"/>
               </a:ext>
             </a:extLst>
           </p:cNvPr>
@@ -1232,7 +1232,7 @@
           <a:bodyPr/>
           <a:lstStyle/>
           <a:p>
-            <a:fld id="{7C5932AC-8A4A-4D44-A795-EB17C097D024}" type="datetimeFigureOut">
+            <a:fld id="{F0C067B3-486C-43B8-8CB8-F25D5694A965}" type="datetimeFigureOut">
               <a:rPr kumimoji="1" lang="ja-JP" altLang="en-US" smtClean="0"/>
               <a:t>2026/7/30</a:t>
             </a:fld>
@@ -1245,7 +1245,7 @@
           <p:cNvPr id="5" name="フッター プレースホルダー 4">
             <a:extLst>
               <a:ext uri="{FF2B5EF4-FFF2-40B4-BE49-F238E27FC236}">
-                <a16:creationId xmlns:a16="http://schemas.microsoft.com/office/drawing/2014/main" id="{BD5C8E63-3526-E74E-F6B1-2E96270BA84A}"/>
+                <a16:creationId xmlns:a16="http://schemas.microsoft.com/office/drawing/2014/main" id="{F7F102A2-57BE-0C14-327E-07E085855B39}"/>
               </a:ext>
             </a:extLst>
           </p:cNvPr>
@@ -1270,7 +1270,7 @@
           <p:cNvPr id="6" name="スライド番号プレースホルダー 5">
             <a:extLst>
               <a:ext uri="{FF2B5EF4-FFF2-40B4-BE49-F238E27FC236}">
-                <a16:creationId xmlns:a16="http://schemas.microsoft.com/office/drawing/2014/main" id="{D247110D-EF8D-8DA2-E495-F2546040921A}"/>
+                <a16:creationId xmlns:a16="http://schemas.microsoft.com/office/drawing/2014/main" id="{320BAC7D-F54B-C6D2-0B97-5AD87CE09273}"/>
               </a:ext>
             </a:extLst>
           </p:cNvPr>
@@ -1286,7 +1286,7 @@
           <a:bodyPr/>
           <a:lstStyle/>
           <a:p>
-            <a:fld id="{79E68B47-8499-4127-ADBF-8D3F68AAD936}" type="slidenum">
+            <a:fld id="{C1C2DDE5-B11C-419E-B46A-CBCC68887370}" type="slidenum">
               <a:rPr kumimoji="1" lang="ja-JP" altLang="en-US" smtClean="0"/>
               <a:t>‹#›</a:t>
             </a:fld>
@@ -1297,7 +1297,7 @@
     </p:spTree>
     <p:extLst>
       <p:ext uri="{BB962C8B-B14F-4D97-AF65-F5344CB8AC3E}">
-        <p14:creationId xmlns:p14="http://schemas.microsoft.com/office/powerpoint/2010/main" val="1446156455"/>
+        <p14:creationId xmlns:p14="http://schemas.microsoft.com/office/powerpoint/2010/main" val="3474858268"/>
       </p:ext>
     </p:extLst>
   </p:cSld>
@@ -1329,7 +1329,7 @@
           <p:cNvPr id="2" name="タイトル 1">
             <a:extLst>
               <a:ext uri="{FF2B5EF4-FFF2-40B4-BE49-F238E27FC236}">
-                <a16:creationId xmlns:a16="http://schemas.microsoft.com/office/drawing/2014/main" id="{C647D55D-223C-7662-BAF3-2C460A498A3C}"/>
+                <a16:creationId xmlns:a16="http://schemas.microsoft.com/office/drawing/2014/main" id="{41F9CD6B-1F8E-6C56-3E85-0F078B1E46E4}"/>
               </a:ext>
             </a:extLst>
           </p:cNvPr>
@@ -1357,7 +1357,7 @@
           <p:cNvPr id="3" name="コンテンツ プレースホルダー 2">
             <a:extLst>
               <a:ext uri="{FF2B5EF4-FFF2-40B4-BE49-F238E27FC236}">
-                <a16:creationId xmlns:a16="http://schemas.microsoft.com/office/drawing/2014/main" id="{44701CE8-193F-E0A8-F6F6-8F25EE3E0509}"/>
+                <a16:creationId xmlns:a16="http://schemas.microsoft.com/office/drawing/2014/main" id="{89A37D22-6AEB-26E7-8AAC-0DB6B2DB3750}"/>
               </a:ext>
             </a:extLst>
           </p:cNvPr>
@@ -1451,7 +1451,7 @@
           <p:cNvPr id="4" name="コンテンツ プレースホルダー 3">
             <a:extLst>
               <a:ext uri="{FF2B5EF4-FFF2-40B4-BE49-F238E27FC236}">
-                <a16:creationId xmlns:a16="http://schemas.microsoft.com/office/drawing/2014/main" id="{21F16F35-B68E-C033-52CB-5AC205A68BA8}"/>
+                <a16:creationId xmlns:a16="http://schemas.microsoft.com/office/drawing/2014/main" id="{9C1A2243-EAFC-19A0-B5DC-24DAF73727A6}"/>
               </a:ext>
             </a:extLst>
           </p:cNvPr>
@@ -1545,7 +1545,7 @@
           <p:cNvPr id="5" name="日付プレースホルダー 4">
             <a:extLst>
               <a:ext uri="{FF2B5EF4-FFF2-40B4-BE49-F238E27FC236}">
-                <a16:creationId xmlns:a16="http://schemas.microsoft.com/office/drawing/2014/main" id="{17917177-7CB9-2008-6C45-0F9FBF7FC0F1}"/>
+                <a16:creationId xmlns:a16="http://schemas.microsoft.com/office/drawing/2014/main" id="{116E8501-CCA5-F328-E507-11DAB01E2FCA}"/>
               </a:ext>
             </a:extLst>
           </p:cNvPr>
@@ -1561,7 +1561,7 @@
           <a:bodyPr/>
           <a:lstStyle/>
           <a:p>
-            <a:fld id="{7C5932AC-8A4A-4D44-A795-EB17C097D024}" type="datetimeFigureOut">
+            <a:fld id="{F0C067B3-486C-43B8-8CB8-F25D5694A965}" type="datetimeFigureOut">
               <a:rPr kumimoji="1" lang="ja-JP" altLang="en-US" smtClean="0"/>
               <a:t>2026/7/30</a:t>
             </a:fld>
@@ -1574,7 +1574,7 @@
           <p:cNvPr id="6" name="フッター プレースホルダー 5">
             <a:extLst>
               <a:ext uri="{FF2B5EF4-FFF2-40B4-BE49-F238E27FC236}">
-                <a16:creationId xmlns:a16="http://schemas.microsoft.com/office/drawing/2014/main" id="{F624256C-A898-0C8B-FEBC-2A1F37BA3AB4}"/>
+                <a16:creationId xmlns:a16="http://schemas.microsoft.com/office/drawing/2014/main" id="{52937834-7BDC-CBE0-97BF-AA148555B812}"/>
               </a:ext>
             </a:extLst>
           </p:cNvPr>
@@ -1599,7 +1599,7 @@
           <p:cNvPr id="7" name="スライド番号プレースホルダー 6">
             <a:extLst>
               <a:ext uri="{FF2B5EF4-FFF2-40B4-BE49-F238E27FC236}">
-                <a16:creationId xmlns:a16="http://schemas.microsoft.com/office/drawing/2014/main" id="{694E7EFF-87E2-B300-8441-FC07D5C1D351}"/>
+                <a16:creationId xmlns:a16="http://schemas.microsoft.com/office/drawing/2014/main" id="{EF8CC3DF-D2EA-6CFE-D6AE-FF42E7807768}"/>
               </a:ext>
             </a:extLst>
           </p:cNvPr>
@@ -1615,7 +1615,7 @@
           <a:bodyPr/>
           <a:lstStyle/>
           <a:p>
-            <a:fld id="{79E68B47-8499-4127-ADBF-8D3F68AAD936}" type="slidenum">
+            <a:fld id="{C1C2DDE5-B11C-419E-B46A-CBCC68887370}" type="slidenum">
               <a:rPr kumimoji="1" lang="ja-JP" altLang="en-US" smtClean="0"/>
               <a:t>‹#›</a:t>
             </a:fld>
@@ -1626,7 +1626,7 @@
     </p:spTree>
     <p:extLst>
       <p:ext uri="{BB962C8B-B14F-4D97-AF65-F5344CB8AC3E}">
-        <p14:creationId xmlns:p14="http://schemas.microsoft.com/office/powerpoint/2010/main" val="64556216"/>
+        <p14:creationId xmlns:p14="http://schemas.microsoft.com/office/powerpoint/2010/main" val="1268217600"/>
       </p:ext>
     </p:extLst>
   </p:cSld>
@@ -1658,7 +1658,7 @@
           <p:cNvPr id="2" name="タイトル 1">
             <a:extLst>
               <a:ext uri="{FF2B5EF4-FFF2-40B4-BE49-F238E27FC236}">
-                <a16:creationId xmlns:a16="http://schemas.microsoft.com/office/drawing/2014/main" id="{93B33371-FE45-BD11-9101-9F1215BFDC10}"/>
+                <a16:creationId xmlns:a16="http://schemas.microsoft.com/office/drawing/2014/main" id="{226CF595-2CFB-A439-2A5A-8BE23211413A}"/>
               </a:ext>
             </a:extLst>
           </p:cNvPr>
@@ -1691,7 +1691,7 @@
           <p:cNvPr id="3" name="テキスト プレースホルダー 2">
             <a:extLst>
               <a:ext uri="{FF2B5EF4-FFF2-40B4-BE49-F238E27FC236}">
-                <a16:creationId xmlns:a16="http://schemas.microsoft.com/office/drawing/2014/main" id="{E7D26398-11F5-8D8C-2FED-BC82E5B0E524}"/>
+                <a16:creationId xmlns:a16="http://schemas.microsoft.com/office/drawing/2014/main" id="{9CD91E1E-7225-8D2F-1212-DF51B60F36B8}"/>
               </a:ext>
             </a:extLst>
           </p:cNvPr>
@@ -1762,7 +1762,7 @@
           <p:cNvPr id="4" name="コンテンツ プレースホルダー 3">
             <a:extLst>
               <a:ext uri="{FF2B5EF4-FFF2-40B4-BE49-F238E27FC236}">
-                <a16:creationId xmlns:a16="http://schemas.microsoft.com/office/drawing/2014/main" id="{624E685E-A66E-DDAD-59C7-20371EC9A6EB}"/>
+                <a16:creationId xmlns:a16="http://schemas.microsoft.com/office/drawing/2014/main" id="{DC36C397-8C01-4D49-480B-9A5ADA1F776B}"/>
               </a:ext>
             </a:extLst>
           </p:cNvPr>
@@ -1856,7 +1856,7 @@
           <p:cNvPr id="5" name="テキスト プレースホルダー 4">
             <a:extLst>
               <a:ext uri="{FF2B5EF4-FFF2-40B4-BE49-F238E27FC236}">
-                <a16:creationId xmlns:a16="http://schemas.microsoft.com/office/drawing/2014/main" id="{2A95711D-67F8-95A2-C051-A1D26C158585}"/>
+                <a16:creationId xmlns:a16="http://schemas.microsoft.com/office/drawing/2014/main" id="{1F95A52D-A2D3-52CD-8665-A4661400FB88}"/>
               </a:ext>
             </a:extLst>
           </p:cNvPr>
@@ -1927,7 +1927,7 @@
           <p:cNvPr id="6" name="コンテンツ プレースホルダー 5">
             <a:extLst>
               <a:ext uri="{FF2B5EF4-FFF2-40B4-BE49-F238E27FC236}">
-                <a16:creationId xmlns:a16="http://schemas.microsoft.com/office/drawing/2014/main" id="{11374D3E-CC82-CDF6-FEB7-00C6FF7F8C1C}"/>
+                <a16:creationId xmlns:a16="http://schemas.microsoft.com/office/drawing/2014/main" id="{EFC85229-AEE1-4374-379C-CF55A6DFF2FB}"/>
               </a:ext>
             </a:extLst>
           </p:cNvPr>
@@ -2021,7 +2021,7 @@
           <p:cNvPr id="7" name="日付プレースホルダー 6">
             <a:extLst>
               <a:ext uri="{FF2B5EF4-FFF2-40B4-BE49-F238E27FC236}">
-                <a16:creationId xmlns:a16="http://schemas.microsoft.com/office/drawing/2014/main" id="{D05515E6-FF4F-AEC6-DF65-5104FC5A476C}"/>
+                <a16:creationId xmlns:a16="http://schemas.microsoft.com/office/drawing/2014/main" id="{9F846293-D239-0096-952B-E387BB904485}"/>
               </a:ext>
             </a:extLst>
           </p:cNvPr>
@@ -2037,7 +2037,7 @@
           <a:bodyPr/>
           <a:lstStyle/>
           <a:p>
-            <a:fld id="{7C5932AC-8A4A-4D44-A795-EB17C097D024}" type="datetimeFigureOut">
+            <a:fld id="{F0C067B3-486C-43B8-8CB8-F25D5694A965}" type="datetimeFigureOut">
               <a:rPr kumimoji="1" lang="ja-JP" altLang="en-US" smtClean="0"/>
               <a:t>2026/7/30</a:t>
             </a:fld>
@@ -2050,7 +2050,7 @@
           <p:cNvPr id="8" name="フッター プレースホルダー 7">
             <a:extLst>
               <a:ext uri="{FF2B5EF4-FFF2-40B4-BE49-F238E27FC236}">
-                <a16:creationId xmlns:a16="http://schemas.microsoft.com/office/drawing/2014/main" id="{09B17DCC-7592-6A15-B647-E04F8A0CA197}"/>
+                <a16:creationId xmlns:a16="http://schemas.microsoft.com/office/drawing/2014/main" id="{A2154199-6303-CC36-FC85-C7A4250E3F4A}"/>
               </a:ext>
             </a:extLst>
           </p:cNvPr>
@@ -2075,7 +2075,7 @@
           <p:cNvPr id="9" name="スライド番号プレースホルダー 8">
             <a:extLst>
               <a:ext uri="{FF2B5EF4-FFF2-40B4-BE49-F238E27FC236}">
-                <a16:creationId xmlns:a16="http://schemas.microsoft.com/office/drawing/2014/main" id="{D4E87FD5-C7ED-3734-2940-97D6EA7CDEE9}"/>
+                <a16:creationId xmlns:a16="http://schemas.microsoft.com/office/drawing/2014/main" id="{D3273DD0-5E65-80E5-906C-26FFF71CD79F}"/>
               </a:ext>
             </a:extLst>
           </p:cNvPr>
@@ -2091,7 +2091,7 @@
           <a:bodyPr/>
           <a:lstStyle/>
           <a:p>
-            <a:fld id="{79E68B47-8499-4127-ADBF-8D3F68AAD936}" type="slidenum">
+            <a:fld id="{C1C2DDE5-B11C-419E-B46A-CBCC68887370}" type="slidenum">
               <a:rPr kumimoji="1" lang="ja-JP" altLang="en-US" smtClean="0"/>
               <a:t>‹#›</a:t>
             </a:fld>
@@ -2102,7 +2102,7 @@
     </p:spTree>
     <p:extLst>
       <p:ext uri="{BB962C8B-B14F-4D97-AF65-F5344CB8AC3E}">
-        <p14:creationId xmlns:p14="http://schemas.microsoft.com/office/powerpoint/2010/main" val="2053775109"/>
+        <p14:creationId xmlns:p14="http://schemas.microsoft.com/office/powerpoint/2010/main" val="213368967"/>
       </p:ext>
     </p:extLst>
   </p:cSld>
@@ -2134,7 +2134,7 @@
           <p:cNvPr id="2" name="タイトル 1">
             <a:extLst>
               <a:ext uri="{FF2B5EF4-FFF2-40B4-BE49-F238E27FC236}">
-                <a16:creationId xmlns:a16="http://schemas.microsoft.com/office/drawing/2014/main" id="{4158D9B5-CFF6-4B42-4C12-F83A1EFC7BBE}"/>
+                <a16:creationId xmlns:a16="http://schemas.microsoft.com/office/drawing/2014/main" id="{E8AB150E-8DCA-9277-FB85-730D01B2DD48}"/>
               </a:ext>
             </a:extLst>
           </p:cNvPr>
@@ -2162,7 +2162,7 @@
           <p:cNvPr id="3" name="日付プレースホルダー 2">
             <a:extLst>
               <a:ext uri="{FF2B5EF4-FFF2-40B4-BE49-F238E27FC236}">
-                <a16:creationId xmlns:a16="http://schemas.microsoft.com/office/drawing/2014/main" id="{2A395E2D-CCE3-04B6-0263-0406BBB9A8CE}"/>
+                <a16:creationId xmlns:a16="http://schemas.microsoft.com/office/drawing/2014/main" id="{2FCDF3D2-033D-2FF9-E079-5BEF6BEBFC5F}"/>
               </a:ext>
             </a:extLst>
           </p:cNvPr>
@@ -2178,7 +2178,7 @@
           <a:bodyPr/>
           <a:lstStyle/>
           <a:p>
-            <a:fld id="{7C5932AC-8A4A-4D44-A795-EB17C097D024}" type="datetimeFigureOut">
+            <a:fld id="{F0C067B3-486C-43B8-8CB8-F25D5694A965}" type="datetimeFigureOut">
               <a:rPr kumimoji="1" lang="ja-JP" altLang="en-US" smtClean="0"/>
               <a:t>2026/7/30</a:t>
             </a:fld>
@@ -2191,7 +2191,7 @@
           <p:cNvPr id="4" name="フッター プレースホルダー 3">
             <a:extLst>
               <a:ext uri="{FF2B5EF4-FFF2-40B4-BE49-F238E27FC236}">
-                <a16:creationId xmlns:a16="http://schemas.microsoft.com/office/drawing/2014/main" id="{6F86B39A-01D6-73C7-7184-5E3D5ADE64ED}"/>
+                <a16:creationId xmlns:a16="http://schemas.microsoft.com/office/drawing/2014/main" id="{B39B47A8-A2B9-2D16-0725-7530FC3AA6BE}"/>
               </a:ext>
             </a:extLst>
           </p:cNvPr>
@@ -2216,7 +2216,7 @@
           <p:cNvPr id="5" name="スライド番号プレースホルダー 4">
             <a:extLst>
               <a:ext uri="{FF2B5EF4-FFF2-40B4-BE49-F238E27FC236}">
-                <a16:creationId xmlns:a16="http://schemas.microsoft.com/office/drawing/2014/main" id="{37B82DB9-4994-ADD5-D246-AF1915BB2506}"/>
+                <a16:creationId xmlns:a16="http://schemas.microsoft.com/office/drawing/2014/main" id="{F7E5EA1E-88A1-0D7D-B1B8-AEFFBD71EE41}"/>
               </a:ext>
             </a:extLst>
           </p:cNvPr>
@@ -2232,7 +2232,7 @@
           <a:bodyPr/>
           <a:lstStyle/>
           <a:p>
-            <a:fld id="{79E68B47-8499-4127-ADBF-8D3F68AAD936}" type="slidenum">
+            <a:fld id="{C1C2DDE5-B11C-419E-B46A-CBCC68887370}" type="slidenum">
               <a:rPr kumimoji="1" lang="ja-JP" altLang="en-US" smtClean="0"/>
               <a:t>‹#›</a:t>
             </a:fld>
@@ -2243,7 +2243,7 @@
     </p:spTree>
     <p:extLst>
       <p:ext uri="{BB962C8B-B14F-4D97-AF65-F5344CB8AC3E}">
-        <p14:creationId xmlns:p14="http://schemas.microsoft.com/office/powerpoint/2010/main" val="1321867325"/>
+        <p14:creationId xmlns:p14="http://schemas.microsoft.com/office/powerpoint/2010/main" val="774326059"/>
       </p:ext>
     </p:extLst>
   </p:cSld>
@@ -2275,7 +2275,7 @@
           <p:cNvPr id="2" name="日付プレースホルダー 1">
             <a:extLst>
               <a:ext uri="{FF2B5EF4-FFF2-40B4-BE49-F238E27FC236}">
-                <a16:creationId xmlns:a16="http://schemas.microsoft.com/office/drawing/2014/main" id="{459FF550-D5FD-AC2D-77B0-1091E8704DD3}"/>
+                <a16:creationId xmlns:a16="http://schemas.microsoft.com/office/drawing/2014/main" id="{72261DFA-AB39-E012-67C3-57AA930C2DB5}"/>
               </a:ext>
             </a:extLst>
           </p:cNvPr>
@@ -2291,7 +2291,7 @@
           <a:bodyPr/>
           <a:lstStyle/>
           <a:p>
-            <a:fld id="{7C5932AC-8A4A-4D44-A795-EB17C097D024}" type="datetimeFigureOut">
+            <a:fld id="{F0C067B3-486C-43B8-8CB8-F25D5694A965}" type="datetimeFigureOut">
               <a:rPr kumimoji="1" lang="ja-JP" altLang="en-US" smtClean="0"/>
               <a:t>2026/7/30</a:t>
             </a:fld>
@@ -2304,7 +2304,7 @@
           <p:cNvPr id="3" name="フッター プレースホルダー 2">
             <a:extLst>
               <a:ext uri="{FF2B5EF4-FFF2-40B4-BE49-F238E27FC236}">
-                <a16:creationId xmlns:a16="http://schemas.microsoft.com/office/drawing/2014/main" id="{7327C43F-69BA-D4E9-ABDF-7BC74C9A45D6}"/>
+                <a16:creationId xmlns:a16="http://schemas.microsoft.com/office/drawing/2014/main" id="{CA8CBD58-CAE3-DDCE-F3C9-A5FD2AABB044}"/>
               </a:ext>
             </a:extLst>
           </p:cNvPr>
@@ -2329,7 +2329,7 @@
           <p:cNvPr id="4" name="スライド番号プレースホルダー 3">
             <a:extLst>
               <a:ext uri="{FF2B5EF4-FFF2-40B4-BE49-F238E27FC236}">
-                <a16:creationId xmlns:a16="http://schemas.microsoft.com/office/drawing/2014/main" id="{D5BC859A-D846-4A9C-100C-55F52508A376}"/>
+                <a16:creationId xmlns:a16="http://schemas.microsoft.com/office/drawing/2014/main" id="{9500E245-E985-0E20-A969-02541B8888C2}"/>
               </a:ext>
             </a:extLst>
           </p:cNvPr>
@@ -2345,7 +2345,7 @@
           <a:bodyPr/>
           <a:lstStyle/>
           <a:p>
-            <a:fld id="{79E68B47-8499-4127-ADBF-8D3F68AAD936}" type="slidenum">
+            <a:fld id="{C1C2DDE5-B11C-419E-B46A-CBCC68887370}" type="slidenum">
               <a:rPr kumimoji="1" lang="ja-JP" altLang="en-US" smtClean="0"/>
               <a:t>‹#›</a:t>
             </a:fld>
@@ -2356,7 +2356,7 @@
     </p:spTree>
     <p:extLst>
       <p:ext uri="{BB962C8B-B14F-4D97-AF65-F5344CB8AC3E}">
-        <p14:creationId xmlns:p14="http://schemas.microsoft.com/office/powerpoint/2010/main" val="2497985491"/>
+        <p14:creationId xmlns:p14="http://schemas.microsoft.com/office/powerpoint/2010/main" val="2592252553"/>
       </p:ext>
     </p:extLst>
   </p:cSld>
@@ -2388,7 +2388,7 @@
           <p:cNvPr id="2" name="タイトル 1">
             <a:extLst>
               <a:ext uri="{FF2B5EF4-FFF2-40B4-BE49-F238E27FC236}">
-                <a16:creationId xmlns:a16="http://schemas.microsoft.com/office/drawing/2014/main" id="{5E930D5C-2311-3E16-EBA9-407103CA3B2D}"/>
+                <a16:creationId xmlns:a16="http://schemas.microsoft.com/office/drawing/2014/main" id="{D552CE8A-0B9D-8940-E486-59EE70EBF169}"/>
               </a:ext>
             </a:extLst>
           </p:cNvPr>
@@ -2425,7 +2425,7 @@
           <p:cNvPr id="3" name="コンテンツ プレースホルダー 2">
             <a:extLst>
               <a:ext uri="{FF2B5EF4-FFF2-40B4-BE49-F238E27FC236}">
-                <a16:creationId xmlns:a16="http://schemas.microsoft.com/office/drawing/2014/main" id="{3537D2C2-B4A6-2143-6241-1957A7C05B16}"/>
+                <a16:creationId xmlns:a16="http://schemas.microsoft.com/office/drawing/2014/main" id="{9DA93FFC-99F3-7F56-E737-9FF4B3691A8D}"/>
               </a:ext>
             </a:extLst>
           </p:cNvPr>
@@ -2547,7 +2547,7 @@
           <p:cNvPr id="4" name="テキスト プレースホルダー 3">
             <a:extLst>
               <a:ext uri="{FF2B5EF4-FFF2-40B4-BE49-F238E27FC236}">
-                <a16:creationId xmlns:a16="http://schemas.microsoft.com/office/drawing/2014/main" id="{D4FB13BD-E809-882A-C013-B6BF9080024D}"/>
+                <a16:creationId xmlns:a16="http://schemas.microsoft.com/office/drawing/2014/main" id="{3766761E-0835-F4DA-0F20-2D8B8334D364}"/>
               </a:ext>
             </a:extLst>
           </p:cNvPr>
@@ -2618,7 +2618,7 @@
           <p:cNvPr id="5" name="日付プレースホルダー 4">
             <a:extLst>
               <a:ext uri="{FF2B5EF4-FFF2-40B4-BE49-F238E27FC236}">
-                <a16:creationId xmlns:a16="http://schemas.microsoft.com/office/drawing/2014/main" id="{7A3D6932-C124-9929-60D3-EF97830F5081}"/>
+                <a16:creationId xmlns:a16="http://schemas.microsoft.com/office/drawing/2014/main" id="{09601333-0C07-1966-0E55-1355E2AEF226}"/>
               </a:ext>
             </a:extLst>
           </p:cNvPr>
@@ -2634,7 +2634,7 @@
           <a:bodyPr/>
           <a:lstStyle/>
           <a:p>
-            <a:fld id="{7C5932AC-8A4A-4D44-A795-EB17C097D024}" type="datetimeFigureOut">
+            <a:fld id="{F0C067B3-486C-43B8-8CB8-F25D5694A965}" type="datetimeFigureOut">
               <a:rPr kumimoji="1" lang="ja-JP" altLang="en-US" smtClean="0"/>
               <a:t>2026/7/30</a:t>
             </a:fld>
@@ -2647,7 +2647,7 @@
           <p:cNvPr id="6" name="フッター プレースホルダー 5">
             <a:extLst>
               <a:ext uri="{FF2B5EF4-FFF2-40B4-BE49-F238E27FC236}">
-                <a16:creationId xmlns:a16="http://schemas.microsoft.com/office/drawing/2014/main" id="{BD70D319-3F98-D847-4C7D-2D79EFEBFF30}"/>
+                <a16:creationId xmlns:a16="http://schemas.microsoft.com/office/drawing/2014/main" id="{5A002E56-A150-452A-089C-93E8EAA65264}"/>
               </a:ext>
             </a:extLst>
           </p:cNvPr>
@@ -2672,7 +2672,7 @@
           <p:cNvPr id="7" name="スライド番号プレースホルダー 6">
             <a:extLst>
               <a:ext uri="{FF2B5EF4-FFF2-40B4-BE49-F238E27FC236}">
-                <a16:creationId xmlns:a16="http://schemas.microsoft.com/office/drawing/2014/main" id="{7AFF7460-108D-AACB-4489-A7AA71361C9C}"/>
+                <a16:creationId xmlns:a16="http://schemas.microsoft.com/office/drawing/2014/main" id="{E737BCEA-403A-A1A5-953D-BBA84010E862}"/>
               </a:ext>
             </a:extLst>
           </p:cNvPr>
@@ -2688,7 +2688,7 @@
           <a:bodyPr/>
           <a:lstStyle/>
           <a:p>
-            <a:fld id="{79E68B47-8499-4127-ADBF-8D3F68AAD936}" type="slidenum">
+            <a:fld id="{C1C2DDE5-B11C-419E-B46A-CBCC68887370}" type="slidenum">
               <a:rPr kumimoji="1" lang="ja-JP" altLang="en-US" smtClean="0"/>
               <a:t>‹#›</a:t>
             </a:fld>
@@ -2699,7 +2699,7 @@
     </p:spTree>
     <p:extLst>
       <p:ext uri="{BB962C8B-B14F-4D97-AF65-F5344CB8AC3E}">
-        <p14:creationId xmlns:p14="http://schemas.microsoft.com/office/powerpoint/2010/main" val="2672357928"/>
+        <p14:creationId xmlns:p14="http://schemas.microsoft.com/office/powerpoint/2010/main" val="3890284225"/>
       </p:ext>
     </p:extLst>
   </p:cSld>
@@ -2731,7 +2731,7 @@
           <p:cNvPr id="2" name="タイトル 1">
             <a:extLst>
               <a:ext uri="{FF2B5EF4-FFF2-40B4-BE49-F238E27FC236}">
-                <a16:creationId xmlns:a16="http://schemas.microsoft.com/office/drawing/2014/main" id="{F94518F2-B100-86BD-BAA4-E5CCEBE990D7}"/>
+                <a16:creationId xmlns:a16="http://schemas.microsoft.com/office/drawing/2014/main" id="{0A8C4663-D17F-69C2-8126-234E54E6B8F6}"/>
               </a:ext>
             </a:extLst>
           </p:cNvPr>
@@ -2768,7 +2768,7 @@
           <p:cNvPr id="3" name="図プレースホルダー 2">
             <a:extLst>
               <a:ext uri="{FF2B5EF4-FFF2-40B4-BE49-F238E27FC236}">
-                <a16:creationId xmlns:a16="http://schemas.microsoft.com/office/drawing/2014/main" id="{25133C09-E3DE-ECB1-D2C2-B792654F7B74}"/>
+                <a16:creationId xmlns:a16="http://schemas.microsoft.com/office/drawing/2014/main" id="{201CD876-0866-B52E-F3AB-728FB411ADE4}"/>
               </a:ext>
             </a:extLst>
           </p:cNvPr>
@@ -2835,7 +2835,7 @@
           <p:cNvPr id="4" name="テキスト プレースホルダー 3">
             <a:extLst>
               <a:ext uri="{FF2B5EF4-FFF2-40B4-BE49-F238E27FC236}">
-                <a16:creationId xmlns:a16="http://schemas.microsoft.com/office/drawing/2014/main" id="{15B59ADE-564E-4830-1749-BD53C8645545}"/>
+                <a16:creationId xmlns:a16="http://schemas.microsoft.com/office/drawing/2014/main" id="{559CDAE9-99A0-D65A-364C-0D8F5FEAEC07}"/>
               </a:ext>
             </a:extLst>
           </p:cNvPr>
@@ -2906,7 +2906,7 @@
           <p:cNvPr id="5" name="日付プレースホルダー 4">
             <a:extLst>
               <a:ext uri="{FF2B5EF4-FFF2-40B4-BE49-F238E27FC236}">
-                <a16:creationId xmlns:a16="http://schemas.microsoft.com/office/drawing/2014/main" id="{3A0D0A4D-0F71-EE40-6FA0-6AEA9B12B797}"/>
+                <a16:creationId xmlns:a16="http://schemas.microsoft.com/office/drawing/2014/main" id="{D092449F-4130-3126-079E-101165FD47EA}"/>
               </a:ext>
             </a:extLst>
           </p:cNvPr>
@@ -2922,7 +2922,7 @@
           <a:bodyPr/>
           <a:lstStyle/>
           <a:p>
-            <a:fld id="{7C5932AC-8A4A-4D44-A795-EB17C097D024}" type="datetimeFigureOut">
+            <a:fld id="{F0C067B3-486C-43B8-8CB8-F25D5694A965}" type="datetimeFigureOut">
               <a:rPr kumimoji="1" lang="ja-JP" altLang="en-US" smtClean="0"/>
               <a:t>2026/7/30</a:t>
             </a:fld>
@@ -2935,7 +2935,7 @@
           <p:cNvPr id="6" name="フッター プレースホルダー 5">
             <a:extLst>
               <a:ext uri="{FF2B5EF4-FFF2-40B4-BE49-F238E27FC236}">
-                <a16:creationId xmlns:a16="http://schemas.microsoft.com/office/drawing/2014/main" id="{4F801928-6475-04DB-700C-795589367276}"/>
+                <a16:creationId xmlns:a16="http://schemas.microsoft.com/office/drawing/2014/main" id="{88096D9E-18F8-12C8-6726-D17DB77F5DF9}"/>
               </a:ext>
             </a:extLst>
           </p:cNvPr>
@@ -2960,7 +2960,7 @@
           <p:cNvPr id="7" name="スライド番号プレースホルダー 6">
             <a:extLst>
               <a:ext uri="{FF2B5EF4-FFF2-40B4-BE49-F238E27FC236}">
-                <a16:creationId xmlns:a16="http://schemas.microsoft.com/office/drawing/2014/main" id="{BC6D3749-12C7-D1BD-17B1-465CD9E4C577}"/>
+                <a16:creationId xmlns:a16="http://schemas.microsoft.com/office/drawing/2014/main" id="{3616DF07-7577-69C4-F94D-BDA40331FEDC}"/>
               </a:ext>
             </a:extLst>
           </p:cNvPr>
@@ -2976,7 +2976,7 @@
           <a:bodyPr/>
           <a:lstStyle/>
           <a:p>
-            <a:fld id="{79E68B47-8499-4127-ADBF-8D3F68AAD936}" type="slidenum">
+            <a:fld id="{C1C2DDE5-B11C-419E-B46A-CBCC68887370}" type="slidenum">
               <a:rPr kumimoji="1" lang="ja-JP" altLang="en-US" smtClean="0"/>
               <a:t>‹#›</a:t>
             </a:fld>
@@ -2987,7 +2987,7 @@
     </p:spTree>
     <p:extLst>
       <p:ext uri="{BB962C8B-B14F-4D97-AF65-F5344CB8AC3E}">
-        <p14:creationId xmlns:p14="http://schemas.microsoft.com/office/powerpoint/2010/main" val="2135364195"/>
+        <p14:creationId xmlns:p14="http://schemas.microsoft.com/office/powerpoint/2010/main" val="2078738085"/>
       </p:ext>
     </p:extLst>
   </p:cSld>
@@ -3024,7 +3024,7 @@
           <p:cNvPr id="2" name="タイトル プレースホルダー 1">
             <a:extLst>
               <a:ext uri="{FF2B5EF4-FFF2-40B4-BE49-F238E27FC236}">
-                <a16:creationId xmlns:a16="http://schemas.microsoft.com/office/drawing/2014/main" id="{95BE24EF-966C-8CF7-7A37-E17085141F71}"/>
+                <a16:creationId xmlns:a16="http://schemas.microsoft.com/office/drawing/2014/main" id="{EB46FE04-3799-5238-94D1-62579E84B700}"/>
               </a:ext>
             </a:extLst>
           </p:cNvPr>
@@ -3062,7 +3062,7 @@
           <p:cNvPr id="3" name="テキスト プレースホルダー 2">
             <a:extLst>
               <a:ext uri="{FF2B5EF4-FFF2-40B4-BE49-F238E27FC236}">
-                <a16:creationId xmlns:a16="http://schemas.microsoft.com/office/drawing/2014/main" id="{6A34043B-7CA6-89B3-46BF-1736754C393D}"/>
+                <a16:creationId xmlns:a16="http://schemas.microsoft.com/office/drawing/2014/main" id="{36594B02-FCCA-F2FD-5836-B1F12763B196}"/>
               </a:ext>
             </a:extLst>
           </p:cNvPr>
@@ -3161,7 +3161,7 @@
           <p:cNvPr id="4" name="日付プレースホルダー 3">
             <a:extLst>
               <a:ext uri="{FF2B5EF4-FFF2-40B4-BE49-F238E27FC236}">
-                <a16:creationId xmlns:a16="http://schemas.microsoft.com/office/drawing/2014/main" id="{95CD8A5F-BB0D-1742-7DD3-0DAFD608BEBF}"/>
+                <a16:creationId xmlns:a16="http://schemas.microsoft.com/office/drawing/2014/main" id="{2625E47F-6C52-C7B5-A02D-20078DAE6B98}"/>
               </a:ext>
             </a:extLst>
           </p:cNvPr>
@@ -3195,7 +3195,7 @@
             </a:lvl1pPr>
           </a:lstStyle>
           <a:p>
-            <a:fld id="{7C5932AC-8A4A-4D44-A795-EB17C097D024}" type="datetimeFigureOut">
+            <a:fld id="{F0C067B3-486C-43B8-8CB8-F25D5694A965}" type="datetimeFigureOut">
               <a:rPr kumimoji="1" lang="ja-JP" altLang="en-US" smtClean="0"/>
               <a:t>2026/7/30</a:t>
             </a:fld>
@@ -3208,7 +3208,7 @@
           <p:cNvPr id="5" name="フッター プレースホルダー 4">
             <a:extLst>
               <a:ext uri="{FF2B5EF4-FFF2-40B4-BE49-F238E27FC236}">
-                <a16:creationId xmlns:a16="http://schemas.microsoft.com/office/drawing/2014/main" id="{39161964-43D9-747C-B8F0-CF29AE89D964}"/>
+                <a16:creationId xmlns:a16="http://schemas.microsoft.com/office/drawing/2014/main" id="{451B4062-C50E-45FB-AAE5-607B070F661E}"/>
               </a:ext>
             </a:extLst>
           </p:cNvPr>
@@ -3251,7 +3251,7 @@
           <p:cNvPr id="6" name="スライド番号プレースホルダー 5">
             <a:extLst>
               <a:ext uri="{FF2B5EF4-FFF2-40B4-BE49-F238E27FC236}">
-                <a16:creationId xmlns:a16="http://schemas.microsoft.com/office/drawing/2014/main" id="{0D3BD638-DED4-ECFE-86E9-D36653B8B610}"/>
+                <a16:creationId xmlns:a16="http://schemas.microsoft.com/office/drawing/2014/main" id="{325A8C1A-7555-5CCC-3A68-0335BB0C4518}"/>
               </a:ext>
             </a:extLst>
           </p:cNvPr>
@@ -3285,7 +3285,7 @@
             </a:lvl1pPr>
           </a:lstStyle>
           <a:p>
-            <a:fld id="{79E68B47-8499-4127-ADBF-8D3F68AAD936}" type="slidenum">
+            <a:fld id="{C1C2DDE5-B11C-419E-B46A-CBCC68887370}" type="slidenum">
               <a:rPr kumimoji="1" lang="ja-JP" altLang="en-US" smtClean="0"/>
               <a:t>‹#›</a:t>
             </a:fld>
@@ -3296,7 +3296,7 @@
     </p:spTree>
     <p:extLst>
       <p:ext uri="{BB962C8B-B14F-4D97-AF65-F5344CB8AC3E}">
-        <p14:creationId xmlns:p14="http://schemas.microsoft.com/office/powerpoint/2010/main" val="2642891677"/>
+        <p14:creationId xmlns:p14="http://schemas.microsoft.com/office/powerpoint/2010/main" val="2239094997"/>
       </p:ext>
     </p:extLst>
   </p:cSld>
@@ -3619,7 +3619,7 @@
           <p:cNvPr id="2" name="テキスト ボックス 1">
             <a:extLst>
               <a:ext uri="{FF2B5EF4-FFF2-40B4-BE49-F238E27FC236}">
-                <a16:creationId xmlns:a16="http://schemas.microsoft.com/office/drawing/2014/main" id="{2D8AA2F5-F018-E75B-95F9-F845CAB867FE}"/>
+                <a16:creationId xmlns:a16="http://schemas.microsoft.com/office/drawing/2014/main" id="{3E79B000-CE07-7E6D-1BB9-BF683CFE8B45}"/>
               </a:ext>
             </a:extLst>
           </p:cNvPr>
@@ -3665,7 +3665,7 @@
           <p:cNvPr id="3" name="テキスト ボックス 2">
             <a:extLst>
               <a:ext uri="{FF2B5EF4-FFF2-40B4-BE49-F238E27FC236}">
-                <a16:creationId xmlns:a16="http://schemas.microsoft.com/office/drawing/2014/main" id="{971EB264-D4D3-AFB9-0272-E148078126A6}"/>
+                <a16:creationId xmlns:a16="http://schemas.microsoft.com/office/drawing/2014/main" id="{50F3A768-5B4A-FA2D-DAA5-BDC9408CE175}"/>
               </a:ext>
             </a:extLst>
           </p:cNvPr>
@@ -3714,7 +3714,7 @@
           <p:cNvPr id="4" name="テキスト ボックス 3">
             <a:extLst>
               <a:ext uri="{FF2B5EF4-FFF2-40B4-BE49-F238E27FC236}">
-                <a16:creationId xmlns:a16="http://schemas.microsoft.com/office/drawing/2014/main" id="{757FA637-0085-7A82-DEB9-01EE026E40BD}"/>
+                <a16:creationId xmlns:a16="http://schemas.microsoft.com/office/drawing/2014/main" id="{B555B577-694E-AE4B-E857-85F3E83C694F}"/>
               </a:ext>
             </a:extLst>
           </p:cNvPr>
@@ -3754,7 +3754,7 @@
           <p:cNvPr id="5" name="テキスト ボックス 4">
             <a:extLst>
               <a:ext uri="{FF2B5EF4-FFF2-40B4-BE49-F238E27FC236}">
-                <a16:creationId xmlns:a16="http://schemas.microsoft.com/office/drawing/2014/main" id="{989EA8CC-D9C2-B144-C469-F123F2471941}"/>
+                <a16:creationId xmlns:a16="http://schemas.microsoft.com/office/drawing/2014/main" id="{8C27A502-1D85-C446-2E25-E4824CA17A3D}"/>
               </a:ext>
             </a:extLst>
           </p:cNvPr>
@@ -3801,7 +3801,7 @@
             <a:hlinkClick r:id="" action="ppaction://media"/>
             <a:extLst>
               <a:ext uri="{FF2B5EF4-FFF2-40B4-BE49-F238E27FC236}">
-                <a16:creationId xmlns:a16="http://schemas.microsoft.com/office/drawing/2014/main" id="{826D173B-C174-C4D7-D887-056A76AE1DA3}"/>
+                <a16:creationId xmlns:a16="http://schemas.microsoft.com/office/drawing/2014/main" id="{3701CC00-8881-9A4D-F253-0CF057535099}"/>
               </a:ext>
             </a:extLst>
           </p:cNvPr>
@@ -3836,7 +3836,7 @@
     </p:spTree>
     <p:extLst>
       <p:ext uri="{BB962C8B-B14F-4D97-AF65-F5344CB8AC3E}">
-        <p14:creationId xmlns:p14="http://schemas.microsoft.com/office/powerpoint/2010/main" val="3845014430"/>
+        <p14:creationId xmlns:p14="http://schemas.microsoft.com/office/powerpoint/2010/main" val="2672751443"/>
       </p:ext>
     </p:extLst>
   </p:cSld>
@@ -3960,7 +3960,7 @@
           <p:cNvPr id="2" name="テキスト ボックス 1">
             <a:extLst>
               <a:ext uri="{FF2B5EF4-FFF2-40B4-BE49-F238E27FC236}">
-                <a16:creationId xmlns:a16="http://schemas.microsoft.com/office/drawing/2014/main" id="{D5430FF5-115B-C0F1-C01D-3F71989E41AB}"/>
+                <a16:creationId xmlns:a16="http://schemas.microsoft.com/office/drawing/2014/main" id="{6A8C706E-A967-9986-A497-CC0F864BC0EC}"/>
               </a:ext>
             </a:extLst>
           </p:cNvPr>
@@ -4006,7 +4006,7 @@
           <p:cNvPr id="3" name="テキスト ボックス 2">
             <a:extLst>
               <a:ext uri="{FF2B5EF4-FFF2-40B4-BE49-F238E27FC236}">
-                <a16:creationId xmlns:a16="http://schemas.microsoft.com/office/drawing/2014/main" id="{266BB089-DFA3-0735-3866-497BFB3884D7}"/>
+                <a16:creationId xmlns:a16="http://schemas.microsoft.com/office/drawing/2014/main" id="{D9BD89BA-FB42-D29A-4703-B285B6751B78}"/>
               </a:ext>
             </a:extLst>
           </p:cNvPr>
@@ -4046,7 +4046,7 @@
           <p:cNvPr id="4" name="テキスト ボックス 3">
             <a:extLst>
               <a:ext uri="{FF2B5EF4-FFF2-40B4-BE49-F238E27FC236}">
-                <a16:creationId xmlns:a16="http://schemas.microsoft.com/office/drawing/2014/main" id="{6517A27C-92A3-6606-344A-562E20FC7BF9}"/>
+                <a16:creationId xmlns:a16="http://schemas.microsoft.com/office/drawing/2014/main" id="{9969437B-6AF8-C83F-39BF-53397BDAF37E}"/>
               </a:ext>
             </a:extLst>
           </p:cNvPr>
@@ -4076,14 +4076,17 @@
                 </a:solidFill>
                 <a:latin typeface="Arial" panose="020B0604020202020204" pitchFamily="34" charset="0"/>
               </a:rPr>
-              <a:t>This is a Next</a:t>
-            </a:r>
-            <a:endParaRPr kumimoji="1" lang="ja-JP" altLang="en-US" sz="2000">
-              <a:solidFill>
-                <a:srgbClr val="333333"/>
-              </a:solidFill>
-              <a:latin typeface="Arial" panose="020B0604020202020204" pitchFamily="34" charset="0"/>
-            </a:endParaRPr>
+              <a:t>Reserve Serapi</a:t>
+            </a:r>
+            <a:r>
+              <a:rPr kumimoji="1" lang="ja-JP" altLang="en-US" sz="2000">
+                <a:solidFill>
+                  <a:srgbClr val="333333"/>
+                </a:solidFill>
+                <a:latin typeface="Arial" panose="020B0604020202020204" pitchFamily="34" charset="0"/>
+              </a:rPr>
+              <a:t>の目的、構成、実装を公開コードから確認できるプロジェクトです。</a:t>
+            </a:r>
           </a:p>
         </p:txBody>
       </p:sp>
@@ -4092,7 +4095,7 @@
           <p:cNvPr id="5" name="テキスト ボックス 4">
             <a:extLst>
               <a:ext uri="{FF2B5EF4-FFF2-40B4-BE49-F238E27FC236}">
-                <a16:creationId xmlns:a16="http://schemas.microsoft.com/office/drawing/2014/main" id="{AEB7CEF9-03C0-72A5-6B8C-B0F4EF1FCBCA}"/>
+                <a16:creationId xmlns:a16="http://schemas.microsoft.com/office/drawing/2014/main" id="{5959A033-8887-6F84-6BA6-BC1A388589F2}"/>
               </a:ext>
             </a:extLst>
           </p:cNvPr>
@@ -4139,7 +4142,7 @@
             <a:hlinkClick r:id="" action="ppaction://media"/>
             <a:extLst>
               <a:ext uri="{FF2B5EF4-FFF2-40B4-BE49-F238E27FC236}">
-                <a16:creationId xmlns:a16="http://schemas.microsoft.com/office/drawing/2014/main" id="{81ADCAE6-FE46-A675-E814-E9FE81951766}"/>
+                <a16:creationId xmlns:a16="http://schemas.microsoft.com/office/drawing/2014/main" id="{F514411E-6A6A-2614-53E6-7F3731D55037}"/>
               </a:ext>
             </a:extLst>
           </p:cNvPr>
@@ -4174,7 +4177,7 @@
     </p:spTree>
     <p:extLst>
       <p:ext uri="{BB962C8B-B14F-4D97-AF65-F5344CB8AC3E}">
-        <p14:creationId xmlns:p14="http://schemas.microsoft.com/office/powerpoint/2010/main" val="3538730658"/>
+        <p14:creationId xmlns:p14="http://schemas.microsoft.com/office/powerpoint/2010/main" val="978327361"/>
       </p:ext>
     </p:extLst>
   </p:cSld>
@@ -4183,10 +4186,10 @@
   </p:clrMapOvr>
   <mc:AlternateContent xmlns:mc="http://schemas.openxmlformats.org/markup-compatibility/2006">
     <mc:Choice xmlns:p14="http://schemas.microsoft.com/office/powerpoint/2010/main" Requires="p14">
-      <p:transition spd="slow" p14:dur="2000" advTm="5000"/>
+      <p:transition spd="slow" p14:dur="2000" advTm="8000"/>
     </mc:Choice>
     <mc:Fallback>
-      <p:transition spd="slow" advTm="5000"/>
+      <p:transition spd="slow" advTm="8000"/>
     </mc:Fallback>
   </mc:AlternateContent>
   <p:timing>
@@ -4217,7 +4220,7 @@
                                   <p:childTnLst>
                                     <p:cmd type="call" cmd="playFrom(0.0)">
                                       <p:cBhvr>
-                                        <p:cTn id="6" dur="2148" fill="hold"/>
+                                        <p:cTn id="6" dur="7141" fill="hold"/>
                                         <p:tgtEl>
                                           <p:spTgt spid="6"/>
                                         </p:tgtEl>
@@ -4298,7 +4301,7 @@
           <p:cNvPr id="2" name="テキスト ボックス 1">
             <a:extLst>
               <a:ext uri="{FF2B5EF4-FFF2-40B4-BE49-F238E27FC236}">
-                <a16:creationId xmlns:a16="http://schemas.microsoft.com/office/drawing/2014/main" id="{95CE741F-494C-CA63-63A4-1B15411C7BF9}"/>
+                <a16:creationId xmlns:a16="http://schemas.microsoft.com/office/drawing/2014/main" id="{DAD75F32-12F2-9CEA-2727-6C22A52CC1C3}"/>
               </a:ext>
             </a:extLst>
           </p:cNvPr>
@@ -4344,7 +4347,7 @@
           <p:cNvPr id="3" name="テキスト ボックス 2">
             <a:extLst>
               <a:ext uri="{FF2B5EF4-FFF2-40B4-BE49-F238E27FC236}">
-                <a16:creationId xmlns:a16="http://schemas.microsoft.com/office/drawing/2014/main" id="{A0CB47C8-AF90-C912-357B-CDFB7CDF9AA2}"/>
+                <a16:creationId xmlns:a16="http://schemas.microsoft.com/office/drawing/2014/main" id="{30645569-AFDC-5E6C-0E27-400C6F116F53}"/>
               </a:ext>
             </a:extLst>
           </p:cNvPr>
@@ -4384,7 +4387,7 @@
           <p:cNvPr id="4" name="テキスト ボックス 3">
             <a:extLst>
               <a:ext uri="{FF2B5EF4-FFF2-40B4-BE49-F238E27FC236}">
-                <a16:creationId xmlns:a16="http://schemas.microsoft.com/office/drawing/2014/main" id="{34076638-2579-A659-7CFA-121402298090}"/>
+                <a16:creationId xmlns:a16="http://schemas.microsoft.com/office/drawing/2014/main" id="{D707EDF4-847F-73CA-92D0-16038373EB3D}"/>
               </a:ext>
             </a:extLst>
           </p:cNvPr>
@@ -4479,7 +4482,7 @@
           <p:cNvPr id="5" name="テキスト ボックス 4">
             <a:extLst>
               <a:ext uri="{FF2B5EF4-FFF2-40B4-BE49-F238E27FC236}">
-                <a16:creationId xmlns:a16="http://schemas.microsoft.com/office/drawing/2014/main" id="{CB1406FD-CCBE-774A-0A48-79E421BBFB0A}"/>
+                <a16:creationId xmlns:a16="http://schemas.microsoft.com/office/drawing/2014/main" id="{00AED54A-148B-2833-17EF-DFA06C67406A}"/>
               </a:ext>
             </a:extLst>
           </p:cNvPr>
@@ -4526,7 +4529,7 @@
             <a:hlinkClick r:id="" action="ppaction://media"/>
             <a:extLst>
               <a:ext uri="{FF2B5EF4-FFF2-40B4-BE49-F238E27FC236}">
-                <a16:creationId xmlns:a16="http://schemas.microsoft.com/office/drawing/2014/main" id="{9F85F153-7536-FD4E-0C2F-1E4B15212D14}"/>
+                <a16:creationId xmlns:a16="http://schemas.microsoft.com/office/drawing/2014/main" id="{7746E604-B554-719D-4D4F-45B36939D65F}"/>
               </a:ext>
             </a:extLst>
           </p:cNvPr>
@@ -4561,7 +4564,7 @@
     </p:spTree>
     <p:extLst>
       <p:ext uri="{BB962C8B-B14F-4D97-AF65-F5344CB8AC3E}">
-        <p14:creationId xmlns:p14="http://schemas.microsoft.com/office/powerpoint/2010/main" val="2041887442"/>
+        <p14:creationId xmlns:p14="http://schemas.microsoft.com/office/powerpoint/2010/main" val="3680040159"/>
       </p:ext>
     </p:extLst>
   </p:cSld>
@@ -4685,7 +4688,7 @@
           <p:cNvPr id="2" name="テキスト ボックス 1">
             <a:extLst>
               <a:ext uri="{FF2B5EF4-FFF2-40B4-BE49-F238E27FC236}">
-                <a16:creationId xmlns:a16="http://schemas.microsoft.com/office/drawing/2014/main" id="{3964212A-18C0-E674-BAD5-97B611B25249}"/>
+                <a16:creationId xmlns:a16="http://schemas.microsoft.com/office/drawing/2014/main" id="{2331A753-8917-40F7-4CED-94CEFD0E8FAB}"/>
               </a:ext>
             </a:extLst>
           </p:cNvPr>
@@ -4731,7 +4734,7 @@
           <p:cNvPr id="3" name="テキスト ボックス 2">
             <a:extLst>
               <a:ext uri="{FF2B5EF4-FFF2-40B4-BE49-F238E27FC236}">
-                <a16:creationId xmlns:a16="http://schemas.microsoft.com/office/drawing/2014/main" id="{76169393-4E18-F48F-CD9A-88DF0D84B14A}"/>
+                <a16:creationId xmlns:a16="http://schemas.microsoft.com/office/drawing/2014/main" id="{701E849C-9D40-5833-E7B4-40A53BBD14CE}"/>
               </a:ext>
             </a:extLst>
           </p:cNvPr>
@@ -4771,7 +4774,7 @@
           <p:cNvPr id="4" name="テキスト ボックス 3">
             <a:extLst>
               <a:ext uri="{FF2B5EF4-FFF2-40B4-BE49-F238E27FC236}">
-                <a16:creationId xmlns:a16="http://schemas.microsoft.com/office/drawing/2014/main" id="{5255CDFC-C29A-CB6D-FFF9-19E960C2627F}"/>
+                <a16:creationId xmlns:a16="http://schemas.microsoft.com/office/drawing/2014/main" id="{4EFBA3E7-0A27-A143-D90E-855D0ECF88B9}"/>
               </a:ext>
             </a:extLst>
           </p:cNvPr>
@@ -4881,7 +4884,7 @@
           <p:cNvPr id="5" name="テキスト ボックス 4">
             <a:extLst>
               <a:ext uri="{FF2B5EF4-FFF2-40B4-BE49-F238E27FC236}">
-                <a16:creationId xmlns:a16="http://schemas.microsoft.com/office/drawing/2014/main" id="{CFCB3D99-9FD7-CA1A-EFEF-666F5499AC88}"/>
+                <a16:creationId xmlns:a16="http://schemas.microsoft.com/office/drawing/2014/main" id="{63B9CBFD-1FCC-69FB-26C5-334B6DAC18F0}"/>
               </a:ext>
             </a:extLst>
           </p:cNvPr>
@@ -4928,7 +4931,7 @@
             <a:hlinkClick r:id="" action="ppaction://media"/>
             <a:extLst>
               <a:ext uri="{FF2B5EF4-FFF2-40B4-BE49-F238E27FC236}">
-                <a16:creationId xmlns:a16="http://schemas.microsoft.com/office/drawing/2014/main" id="{A116A4D7-3DF2-C0CD-F218-85069897CD06}"/>
+                <a16:creationId xmlns:a16="http://schemas.microsoft.com/office/drawing/2014/main" id="{B49C2820-88CD-B5AB-41C3-C83B6ECD67C7}"/>
               </a:ext>
             </a:extLst>
           </p:cNvPr>
@@ -4963,7 +4966,7 @@
     </p:spTree>
     <p:extLst>
       <p:ext uri="{BB962C8B-B14F-4D97-AF65-F5344CB8AC3E}">
-        <p14:creationId xmlns:p14="http://schemas.microsoft.com/office/powerpoint/2010/main" val="2659567758"/>
+        <p14:creationId xmlns:p14="http://schemas.microsoft.com/office/powerpoint/2010/main" val="62720141"/>
       </p:ext>
     </p:extLst>
   </p:cSld>
@@ -5087,7 +5090,7 @@
           <p:cNvPr id="2" name="テキスト ボックス 1">
             <a:extLst>
               <a:ext uri="{FF2B5EF4-FFF2-40B4-BE49-F238E27FC236}">
-                <a16:creationId xmlns:a16="http://schemas.microsoft.com/office/drawing/2014/main" id="{74AEEBD5-39F2-D4DD-DFBF-563A238027CB}"/>
+                <a16:creationId xmlns:a16="http://schemas.microsoft.com/office/drawing/2014/main" id="{51477884-ECAB-3260-1446-B4CA323079A7}"/>
               </a:ext>
             </a:extLst>
           </p:cNvPr>
@@ -5133,7 +5136,7 @@
           <p:cNvPr id="3" name="テキスト ボックス 2">
             <a:extLst>
               <a:ext uri="{FF2B5EF4-FFF2-40B4-BE49-F238E27FC236}">
-                <a16:creationId xmlns:a16="http://schemas.microsoft.com/office/drawing/2014/main" id="{FF96F8D8-A4A0-1B0F-3D11-D31C66B961E2}"/>
+                <a16:creationId xmlns:a16="http://schemas.microsoft.com/office/drawing/2014/main" id="{A37809B9-4D20-A72D-4CAB-CD2EEAB3B27E}"/>
               </a:ext>
             </a:extLst>
           </p:cNvPr>
@@ -5173,7 +5176,7 @@
           <p:cNvPr id="4" name="テキスト ボックス 3">
             <a:extLst>
               <a:ext uri="{FF2B5EF4-FFF2-40B4-BE49-F238E27FC236}">
-                <a16:creationId xmlns:a16="http://schemas.microsoft.com/office/drawing/2014/main" id="{286E9012-43E3-DA20-1BE0-2D64C919CAC9}"/>
+                <a16:creationId xmlns:a16="http://schemas.microsoft.com/office/drawing/2014/main" id="{43A1A7B5-E52C-2446-90E9-18A0CC3F97D1}"/>
               </a:ext>
             </a:extLst>
           </p:cNvPr>
@@ -5197,20 +5200,14 @@
           <a:lstStyle/>
           <a:p>
             <a:r>
-              <a:rPr kumimoji="1" lang="en-US" altLang="ja-JP" sz="2000">
+              <a:rPr kumimoji="1" lang="ja-JP" altLang="en-US" sz="2000">
                 <a:solidFill>
                   <a:srgbClr val="333333"/>
                 </a:solidFill>
                 <a:latin typeface="Arial" panose="020B0604020202020204" pitchFamily="34" charset="0"/>
               </a:rPr>
-              <a:t>Add host-based landing page variants for multi-domain rollout</a:t>
-            </a:r>
-            <a:endParaRPr kumimoji="1" lang="ja-JP" altLang="en-US" sz="2000">
-              <a:solidFill>
-                <a:srgbClr val="333333"/>
-              </a:solidFill>
-              <a:latin typeface="Arial" panose="020B0604020202020204" pitchFamily="34" charset="0"/>
-            </a:endParaRPr>
+              <a:t>直近のコミットでは、新機能の追加と実装強化が行われました。</a:t>
+            </a:r>
           </a:p>
         </p:txBody>
       </p:sp>
@@ -5219,7 +5216,7 @@
           <p:cNvPr id="5" name="テキスト ボックス 4">
             <a:extLst>
               <a:ext uri="{FF2B5EF4-FFF2-40B4-BE49-F238E27FC236}">
-                <a16:creationId xmlns:a16="http://schemas.microsoft.com/office/drawing/2014/main" id="{17A983F6-D455-D3D2-EF6C-15067D83B9B3}"/>
+                <a16:creationId xmlns:a16="http://schemas.microsoft.com/office/drawing/2014/main" id="{B9C35C38-65AD-3E77-2F6A-31FC7E85B864}"/>
               </a:ext>
             </a:extLst>
           </p:cNvPr>
@@ -5266,7 +5263,7 @@
             <a:hlinkClick r:id="" action="ppaction://media"/>
             <a:extLst>
               <a:ext uri="{FF2B5EF4-FFF2-40B4-BE49-F238E27FC236}">
-                <a16:creationId xmlns:a16="http://schemas.microsoft.com/office/drawing/2014/main" id="{6C05C0D2-DA2B-FF71-A2D0-68095B8A7988}"/>
+                <a16:creationId xmlns:a16="http://schemas.microsoft.com/office/drawing/2014/main" id="{5C1D252C-6751-B2CB-CD6C-7695F488962C}"/>
               </a:ext>
             </a:extLst>
           </p:cNvPr>
@@ -5301,7 +5298,7 @@
     </p:spTree>
     <p:extLst>
       <p:ext uri="{BB962C8B-B14F-4D97-AF65-F5344CB8AC3E}">
-        <p14:creationId xmlns:p14="http://schemas.microsoft.com/office/powerpoint/2010/main" val="2774773026"/>
+        <p14:creationId xmlns:p14="http://schemas.microsoft.com/office/powerpoint/2010/main" val="3083153506"/>
       </p:ext>
     </p:extLst>
   </p:cSld>
@@ -5310,10 +5307,10 @@
   </p:clrMapOvr>
   <mc:AlternateContent xmlns:mc="http://schemas.openxmlformats.org/markup-compatibility/2006">
     <mc:Choice xmlns:p14="http://schemas.microsoft.com/office/powerpoint/2010/main" Requires="p14">
-      <p:transition spd="slow" p14:dur="2000" advTm="9000"/>
+      <p:transition spd="slow" p14:dur="2000" advTm="6000"/>
     </mc:Choice>
     <mc:Fallback>
-      <p:transition spd="slow" advTm="9000"/>
+      <p:transition spd="slow" advTm="6000"/>
     </mc:Fallback>
   </mc:AlternateContent>
   <p:timing>
@@ -5344,7 +5341,7 @@
                                   <p:childTnLst>
                                     <p:cmd type="call" cmd="playFrom(0.0)">
                                       <p:cBhvr>
-                                        <p:cTn id="6" dur="8705" fill="hold"/>
+                                        <p:cTn id="6" dur="5687" fill="hold"/>
                                         <p:tgtEl>
                                           <p:spTgt spid="6"/>
                                         </p:tgtEl>
@@ -5425,7 +5422,7 @@
           <p:cNvPr id="2" name="テキスト ボックス 1">
             <a:extLst>
               <a:ext uri="{FF2B5EF4-FFF2-40B4-BE49-F238E27FC236}">
-                <a16:creationId xmlns:a16="http://schemas.microsoft.com/office/drawing/2014/main" id="{233C94CD-6719-EF4E-AC46-15DFAD7BC6B8}"/>
+                <a16:creationId xmlns:a16="http://schemas.microsoft.com/office/drawing/2014/main" id="{F1A2250C-2DE7-8FB8-C8FA-91715B3AC39C}"/>
               </a:ext>
             </a:extLst>
           </p:cNvPr>
@@ -5471,7 +5468,7 @@
           <p:cNvPr id="3" name="テキスト ボックス 2">
             <a:extLst>
               <a:ext uri="{FF2B5EF4-FFF2-40B4-BE49-F238E27FC236}">
-                <a16:creationId xmlns:a16="http://schemas.microsoft.com/office/drawing/2014/main" id="{0F2E60C4-1079-01A8-492D-6AD88189464C}"/>
+                <a16:creationId xmlns:a16="http://schemas.microsoft.com/office/drawing/2014/main" id="{5794961C-B978-0A7D-4156-0E2AA2E4AEC4}"/>
               </a:ext>
             </a:extLst>
           </p:cNvPr>
@@ -5511,7 +5508,7 @@
           <p:cNvPr id="4" name="テキスト ボックス 3">
             <a:extLst>
               <a:ext uri="{FF2B5EF4-FFF2-40B4-BE49-F238E27FC236}">
-                <a16:creationId xmlns:a16="http://schemas.microsoft.com/office/drawing/2014/main" id="{CC526CF4-12E3-DD5A-A1CD-1BA4A341578E}"/>
+                <a16:creationId xmlns:a16="http://schemas.microsoft.com/office/drawing/2014/main" id="{E1E27B15-BF66-8EFF-768C-B36B6BC0F19A}"/>
               </a:ext>
             </a:extLst>
           </p:cNvPr>
@@ -5576,7 +5573,7 @@
           <p:cNvPr id="5" name="テキスト ボックス 4">
             <a:extLst>
               <a:ext uri="{FF2B5EF4-FFF2-40B4-BE49-F238E27FC236}">
-                <a16:creationId xmlns:a16="http://schemas.microsoft.com/office/drawing/2014/main" id="{A427D649-0AC8-6317-6B02-89568C90485F}"/>
+                <a16:creationId xmlns:a16="http://schemas.microsoft.com/office/drawing/2014/main" id="{79C40FEF-CEFB-41A5-5DE7-284A8F4C5C73}"/>
               </a:ext>
             </a:extLst>
           </p:cNvPr>
@@ -5623,7 +5620,7 @@
             <a:hlinkClick r:id="" action="ppaction://media"/>
             <a:extLst>
               <a:ext uri="{FF2B5EF4-FFF2-40B4-BE49-F238E27FC236}">
-                <a16:creationId xmlns:a16="http://schemas.microsoft.com/office/drawing/2014/main" id="{BF4E52FA-BB2D-C1BF-AC2C-52A95C23030E}"/>
+                <a16:creationId xmlns:a16="http://schemas.microsoft.com/office/drawing/2014/main" id="{949382B8-2C43-81F6-C5A0-C3D60CB5B1E0}"/>
               </a:ext>
             </a:extLst>
           </p:cNvPr>
@@ -5658,7 +5655,7 @@
     </p:spTree>
     <p:extLst>
       <p:ext uri="{BB962C8B-B14F-4D97-AF65-F5344CB8AC3E}">
-        <p14:creationId xmlns:p14="http://schemas.microsoft.com/office/powerpoint/2010/main" val="4195277843"/>
+        <p14:creationId xmlns:p14="http://schemas.microsoft.com/office/powerpoint/2010/main" val="1061223693"/>
       </p:ext>
     </p:extLst>
   </p:cSld>
